--- a/docs/content/05-teaching-resources/slides/specialism/02-mechanical-drawings-standards-and-communication.pptx
+++ b/docs/content/05-teaching-resources/slides/specialism/02-mechanical-drawings-standards-and-communication.pptx
@@ -9,12 +9,16 @@
     <p:sldId id="257" r:id="rId8"/>
     <p:sldId id="258" r:id="rId9"/>
     <p:sldId id="259" r:id="rId10"/>
-    <p:sldId id="260" r:id="rId12"/>
+    <p:sldId id="260" r:id="rId11"/>
     <p:sldId id="261" r:id="rId13"/>
     <p:sldId id="262" r:id="rId14"/>
     <p:sldId id="263" r:id="rId15"/>
     <p:sldId id="264" r:id="rId16"/>
     <p:sldId id="265" r:id="rId17"/>
+    <p:sldId id="266" r:id="rId18"/>
+    <p:sldId id="267" r:id="rId19"/>
+    <p:sldId id="268" r:id="rId20"/>
+    <p:sldId id="269" r:id="rId21"/>
   </p:sldIdLst>
   <p:sldSz cx="12191695" cy="6858000" type="screen4x3"/>
   <p:notesSz cx="6858000" cy="9144000"/>
@@ -511,7 +515,22 @@
           <a:lstStyle/>
           <a:p>
             <a:r>
-              <a:t>Learners should know how to access and interpret regulatory requirements for mechanical component design.</a:t>
+              <a:t>Answers:</a:t>
+            </a:r>
+          </a:p>
+          <a:p>
+            <a:r>
+              <a:t>1. The inside of a part as if cut through.</a:t>
+            </a:r>
+          </a:p>
+          <a:p>
+            <a:r>
+              <a:t>2. A numbered label identifying a part.</a:t>
+            </a:r>
+          </a:p>
+          <a:p>
+            <a:r>
+              <a:t>3. BS EN 8888.</a:t>
             </a:r>
           </a:p>
         </p:txBody>
@@ -581,7 +600,7 @@
           <a:lstStyle/>
           <a:p>
             <a:r>
-              <a:t>Give students a few minutes to answer on mini whiteboards or paper, then reveal the answers on the next slide.</a:t>
+              <a:t>Learners should know how to access and interpret regulatory requirements for mechanical component design.</a:t>
             </a:r>
           </a:p>
         </p:txBody>
@@ -651,7 +670,22 @@
           <a:lstStyle/>
           <a:p>
             <a:r>
-              <a:t>Talk through any answers the class found difficult.</a:t>
+              <a:t>Answers:</a:t>
+            </a:r>
+          </a:p>
+          <a:p>
+            <a:r>
+              <a:t>1. Simulates how a design will perform.</a:t>
+            </a:r>
+          </a:p>
+          <a:p>
+            <a:r>
+              <a:t>2. Through CAD to CAM transfer.</a:t>
+            </a:r>
+          </a:p>
+          <a:p>
+            <a:r>
+              <a:t>3. Each audience needs different detail and language.</a:t>
             </a:r>
           </a:p>
         </p:txBody>
@@ -677,6 +711,146 @@
 </file>
 
 <file path=ppt/notesSlides/notesSlide4.xml><?xml version="1.0" encoding="utf-8"?>
+<p:notes xmlns:a="http://schemas.openxmlformats.org/drawingml/2006/main" xmlns:p="http://schemas.openxmlformats.org/presentationml/2006/main" xmlns:r="http://schemas.openxmlformats.org/officeDocument/2006/relationships">
+  <p:cSld>
+    <p:spTree>
+      <p:nvGrpSpPr>
+        <p:cNvPr id="1" name=""/>
+        <p:cNvGrpSpPr/>
+        <p:nvPr/>
+      </p:nvGrpSpPr>
+      <p:grpSpPr>
+        <a:xfrm>
+          <a:off x="0" y="0"/>
+          <a:ext cx="0" cy="0"/>
+          <a:chOff x="0" y="0"/>
+          <a:chExt cx="0" cy="0"/>
+        </a:xfrm>
+      </p:grpSpPr>
+      <p:sp>
+        <p:nvSpPr>
+          <p:cNvPr id="2" name="Slide Image Placeholder 1"/>
+          <p:cNvSpPr>
+            <a:spLocks noGrp="1"/>
+          </p:cNvSpPr>
+          <p:nvPr>
+            <p:ph type="sldImg" idx="2"/>
+          </p:nvPr>
+        </p:nvSpPr>
+        <p:spPr/>
+      </p:sp>
+      <p:sp>
+        <p:nvSpPr>
+          <p:cNvPr id="3" name="Notes Placeholder 2"/>
+          <p:cNvSpPr>
+            <a:spLocks noGrp="1"/>
+          </p:cNvSpPr>
+          <p:nvPr>
+            <p:ph type="body" idx="3" sz="quarter"/>
+          </p:nvPr>
+        </p:nvSpPr>
+        <p:spPr/>
+        <p:txBody>
+          <a:bodyPr/>
+          <a:lstStyle/>
+          <a:p>
+            <a:r>
+              <a:t>Give students a few minutes to answer on mini whiteboards or paper, then reveal the answers on the next slide.</a:t>
+            </a:r>
+          </a:p>
+        </p:txBody>
+      </p:sp>
+      <p:sp>
+        <p:nvSpPr>
+          <p:cNvPr id="4" name="Slide Number Placeholder 3"/>
+          <p:cNvSpPr>
+            <a:spLocks noGrp="1"/>
+          </p:cNvSpPr>
+          <p:nvPr>
+            <p:ph type="sldNum" idx="5" sz="quarter"/>
+          </p:nvPr>
+        </p:nvSpPr>
+        <p:spPr/>
+      </p:sp>
+    </p:spTree>
+  </p:cSld>
+  <p:clrMapOvr>
+    <a:masterClrMapping/>
+  </p:clrMapOvr>
+</p:notes>
+</file>
+
+<file path=ppt/notesSlides/notesSlide5.xml><?xml version="1.0" encoding="utf-8"?>
+<p:notes xmlns:a="http://schemas.openxmlformats.org/drawingml/2006/main" xmlns:p="http://schemas.openxmlformats.org/presentationml/2006/main" xmlns:r="http://schemas.openxmlformats.org/officeDocument/2006/relationships">
+  <p:cSld>
+    <p:spTree>
+      <p:nvGrpSpPr>
+        <p:cNvPr id="1" name=""/>
+        <p:cNvGrpSpPr/>
+        <p:nvPr/>
+      </p:nvGrpSpPr>
+      <p:grpSpPr>
+        <a:xfrm>
+          <a:off x="0" y="0"/>
+          <a:ext cx="0" cy="0"/>
+          <a:chOff x="0" y="0"/>
+          <a:chExt cx="0" cy="0"/>
+        </a:xfrm>
+      </p:grpSpPr>
+      <p:sp>
+        <p:nvSpPr>
+          <p:cNvPr id="2" name="Slide Image Placeholder 1"/>
+          <p:cNvSpPr>
+            <a:spLocks noGrp="1"/>
+          </p:cNvSpPr>
+          <p:nvPr>
+            <p:ph type="sldImg" idx="2"/>
+          </p:nvPr>
+        </p:nvSpPr>
+        <p:spPr/>
+      </p:sp>
+      <p:sp>
+        <p:nvSpPr>
+          <p:cNvPr id="3" name="Notes Placeholder 2"/>
+          <p:cNvSpPr>
+            <a:spLocks noGrp="1"/>
+          </p:cNvSpPr>
+          <p:nvPr>
+            <p:ph type="body" idx="3" sz="quarter"/>
+          </p:nvPr>
+        </p:nvSpPr>
+        <p:spPr/>
+        <p:txBody>
+          <a:bodyPr/>
+          <a:lstStyle/>
+          <a:p>
+            <a:r>
+              <a:t>Talk through any answers the class found difficult.</a:t>
+            </a:r>
+          </a:p>
+        </p:txBody>
+      </p:sp>
+      <p:sp>
+        <p:nvSpPr>
+          <p:cNvPr id="4" name="Slide Number Placeholder 3"/>
+          <p:cNvSpPr>
+            <a:spLocks noGrp="1"/>
+          </p:cNvSpPr>
+          <p:nvPr>
+            <p:ph type="sldNum" idx="5" sz="quarter"/>
+          </p:nvPr>
+        </p:nvSpPr>
+        <p:spPr/>
+      </p:sp>
+    </p:spTree>
+  </p:cSld>
+  <p:clrMapOvr>
+    <a:masterClrMapping/>
+  </p:clrMapOvr>
+</p:notes>
+</file>
+
+<file path=ppt/notesSlides/notesSlide6.xml><?xml version="1.0" encoding="utf-8"?>
 <p:notes xmlns:a="http://schemas.openxmlformats.org/drawingml/2006/main" xmlns:p="http://schemas.openxmlformats.org/presentationml/2006/main" xmlns:r="http://schemas.openxmlformats.org/officeDocument/2006/relationships">
   <p:cSld>
     <p:spTree>
@@ -4052,6 +4226,2639 @@
     <p:bg>
       <p:bgPr>
         <a:solidFill>
+          <a:srgbClr val="FFFFFF"/>
+        </a:solidFill>
+        <a:effectLst/>
+      </p:bgPr>
+    </p:bg>
+    <p:spTree>
+      <p:nvGrpSpPr>
+        <p:cNvPr id="1" name=""/>
+        <p:cNvGrpSpPr/>
+        <p:nvPr/>
+      </p:nvGrpSpPr>
+      <p:grpSpPr/>
+      <p:sp>
+        <p:nvSpPr>
+          <p:cNvPr id="2" name="TextBox 1"/>
+          <p:cNvSpPr txBox="1"/>
+          <p:nvPr/>
+        </p:nvSpPr>
+        <p:spPr>
+          <a:xfrm>
+            <a:off x="548640" y="320040"/>
+            <a:ext cx="11094415" cy="274320"/>
+          </a:xfrm>
+          <a:prstGeom prst="rect">
+            <a:avLst/>
+          </a:prstGeom>
+          <a:noFill/>
+        </p:spPr>
+        <p:txBody>
+          <a:bodyPr wrap="square" anchor="t" lIns="0" rIns="0" tIns="0" bIns="0"/>
+          <a:lstStyle/>
+          <a:p>
+            <a:pPr algn="l"/>
+            <a:r>
+              <a:rPr sz="1100" b="1" i="0">
+                <a:solidFill>
+                  <a:srgbClr val="54595D"/>
+                </a:solidFill>
+                <a:latin typeface="Calibri"/>
+              </a:rPr>
+              <a:t>MECHANICAL ENGINEERING  ·  Mechanical: Knowledge criteria</a:t>
+            </a:r>
+          </a:p>
+        </p:txBody>
+      </p:sp>
+      <p:sp>
+        <p:nvSpPr>
+          <p:cNvPr id="3" name="TextBox 2"/>
+          <p:cNvSpPr txBox="1"/>
+          <p:nvPr/>
+        </p:nvSpPr>
+        <p:spPr>
+          <a:xfrm>
+            <a:off x="548640" y="566928"/>
+            <a:ext cx="11094415" cy="822960"/>
+          </a:xfrm>
+          <a:prstGeom prst="rect">
+            <a:avLst/>
+          </a:prstGeom>
+          <a:noFill/>
+        </p:spPr>
+        <p:txBody>
+          <a:bodyPr wrap="square" anchor="ctr" lIns="0" rIns="0" tIns="0" bIns="0"/>
+          <a:lstStyle/>
+          <a:p>
+            <a:pPr algn="l"/>
+            <a:r>
+              <a:rPr sz="3200" b="1" i="0">
+                <a:solidFill>
+                  <a:srgbClr val="03306E"/>
+                </a:solidFill>
+                <a:latin typeface="Cambria"/>
+              </a:rPr>
+              <a:t>Digital tools</a:t>
+            </a:r>
+          </a:p>
+        </p:txBody>
+      </p:sp>
+      <p:sp>
+        <p:nvSpPr>
+          <p:cNvPr id="4" name="TextBox 3"/>
+          <p:cNvSpPr txBox="1"/>
+          <p:nvPr/>
+        </p:nvSpPr>
+        <p:spPr>
+          <a:xfrm>
+            <a:off x="548640" y="6446520"/>
+            <a:ext cx="8229600" cy="274320"/>
+          </a:xfrm>
+          <a:prstGeom prst="rect">
+            <a:avLst/>
+          </a:prstGeom>
+          <a:noFill/>
+        </p:spPr>
+        <p:txBody>
+          <a:bodyPr wrap="square" anchor="t" lIns="0" rIns="0" tIns="0" bIns="0"/>
+          <a:lstStyle/>
+          <a:p>
+            <a:pPr algn="l"/>
+            <a:r>
+              <a:rPr sz="1000" b="0" i="0">
+                <a:solidFill>
+                  <a:srgbClr val="54595D"/>
+                </a:solidFill>
+                <a:latin typeface="Calibri"/>
+              </a:rPr>
+              <a:t>Design and Development for Engineering and Manufacturing T Level  ·  Mechanical Drawings, Standards and Communication</a:t>
+            </a:r>
+          </a:p>
+        </p:txBody>
+      </p:sp>
+      <p:sp>
+        <p:nvSpPr>
+          <p:cNvPr id="5" name="TextBox 4"/>
+          <p:cNvSpPr txBox="1"/>
+          <p:nvPr/>
+        </p:nvSpPr>
+        <p:spPr>
+          <a:xfrm>
+            <a:off x="10728655" y="6446520"/>
+            <a:ext cx="914400" cy="274320"/>
+          </a:xfrm>
+          <a:prstGeom prst="rect">
+            <a:avLst/>
+          </a:prstGeom>
+          <a:noFill/>
+        </p:spPr>
+        <p:txBody>
+          <a:bodyPr wrap="square" anchor="t" lIns="0" rIns="0" tIns="0" bIns="0"/>
+          <a:lstStyle/>
+          <a:p>
+            <a:pPr algn="r"/>
+            <a:r>
+              <a:rPr sz="1000" b="0" i="0">
+                <a:solidFill>
+                  <a:srgbClr val="54595D"/>
+                </a:solidFill>
+                <a:latin typeface="Calibri"/>
+              </a:rPr>
+              <a:t>10</a:t>
+            </a:r>
+          </a:p>
+        </p:txBody>
+      </p:sp>
+      <p:sp>
+        <p:nvSpPr>
+          <p:cNvPr id="6" name="Rounded Rectangle 5"/>
+          <p:cNvSpPr/>
+          <p:nvPr/>
+        </p:nvSpPr>
+        <p:spPr>
+          <a:xfrm>
+            <a:off x="548640" y="1600200"/>
+            <a:ext cx="5410047" cy="2148840"/>
+          </a:xfrm>
+          <a:prstGeom prst="roundRect">
+            <a:avLst>
+              <a:gd name="adj" fmla="val 6000"/>
+            </a:avLst>
+          </a:prstGeom>
+          <a:solidFill>
+            <a:srgbClr val="EAF3FF"/>
+          </a:solidFill>
+          <a:ln>
+            <a:noFill/>
+          </a:ln>
+          <a:effectLst/>
+        </p:spPr>
+        <p:style>
+          <a:lnRef idx="1">
+            <a:schemeClr val="accent1"/>
+          </a:lnRef>
+          <a:fillRef idx="3">
+            <a:schemeClr val="accent1"/>
+          </a:fillRef>
+          <a:effectRef idx="2">
+            <a:schemeClr val="accent1"/>
+          </a:effectRef>
+          <a:fontRef idx="minor">
+            <a:schemeClr val="lt1"/>
+          </a:fontRef>
+        </p:style>
+        <p:txBody>
+          <a:bodyPr rtlCol="0" anchor="ctr"/>
+          <a:lstStyle/>
+          <a:p/>
+        </p:txBody>
+      </p:sp>
+      <p:sp>
+        <p:nvSpPr>
+          <p:cNvPr id="7" name="Oval 6"/>
+          <p:cNvSpPr/>
+          <p:nvPr/>
+        </p:nvSpPr>
+        <p:spPr>
+          <a:xfrm>
+            <a:off x="777240" y="1828800"/>
+            <a:ext cx="457200" cy="457200"/>
+          </a:xfrm>
+          <a:prstGeom prst="ellipse">
+            <a:avLst/>
+          </a:prstGeom>
+          <a:solidFill>
+            <a:srgbClr val="E0463A"/>
+          </a:solidFill>
+          <a:ln>
+            <a:noFill/>
+          </a:ln>
+          <a:effectLst/>
+        </p:spPr>
+        <p:style>
+          <a:lnRef idx="1">
+            <a:schemeClr val="accent1"/>
+          </a:lnRef>
+          <a:fillRef idx="3">
+            <a:schemeClr val="accent1"/>
+          </a:fillRef>
+          <a:effectRef idx="2">
+            <a:schemeClr val="accent1"/>
+          </a:effectRef>
+          <a:fontRef idx="minor">
+            <a:schemeClr val="lt1"/>
+          </a:fontRef>
+        </p:style>
+        <p:txBody>
+          <a:bodyPr rtlCol="0" anchor="ctr" lIns="0" rIns="0" tIns="0" bIns="0"/>
+          <a:lstStyle/>
+          <a:p>
+            <a:pPr algn="ctr"/>
+            <a:r>
+              <a:rPr sz="1500" b="1">
+                <a:solidFill>
+                  <a:srgbClr val="FFFFFF"/>
+                </a:solidFill>
+                <a:latin typeface="Calibri"/>
+              </a:rPr>
+              <a:t>1</a:t>
+            </a:r>
+          </a:p>
+        </p:txBody>
+      </p:sp>
+      <p:sp>
+        <p:nvSpPr>
+          <p:cNvPr id="8" name="TextBox 7"/>
+          <p:cNvSpPr txBox="1"/>
+          <p:nvPr/>
+        </p:nvSpPr>
+        <p:spPr>
+          <a:xfrm>
+            <a:off x="1371600" y="1801368"/>
+            <a:ext cx="4404207" cy="512064"/>
+          </a:xfrm>
+          <a:prstGeom prst="rect">
+            <a:avLst/>
+          </a:prstGeom>
+          <a:noFill/>
+        </p:spPr>
+        <p:txBody>
+          <a:bodyPr wrap="square" anchor="ctr" lIns="0" rIns="0" tIns="0" bIns="0"/>
+          <a:lstStyle/>
+          <a:p>
+            <a:pPr algn="l"/>
+            <a:r>
+              <a:rPr sz="1900" b="1" i="0">
+                <a:solidFill>
+                  <a:srgbClr val="03306E"/>
+                </a:solidFill>
+                <a:latin typeface="Calibri"/>
+              </a:rPr>
+              <a:t>2D CAD</a:t>
+            </a:r>
+          </a:p>
+        </p:txBody>
+      </p:sp>
+      <p:sp>
+        <p:nvSpPr>
+          <p:cNvPr id="9" name="TextBox 8"/>
+          <p:cNvSpPr txBox="1"/>
+          <p:nvPr/>
+        </p:nvSpPr>
+        <p:spPr>
+          <a:xfrm>
+            <a:off x="777240" y="2468880"/>
+            <a:ext cx="4952847" cy="1143000"/>
+          </a:xfrm>
+          <a:prstGeom prst="rect">
+            <a:avLst/>
+          </a:prstGeom>
+          <a:noFill/>
+        </p:spPr>
+        <p:txBody>
+          <a:bodyPr wrap="square" anchor="t" lIns="0" rIns="0" tIns="0" bIns="0"/>
+          <a:lstStyle/>
+          <a:p>
+            <a:pPr algn="l"/>
+            <a:r>
+              <a:rPr sz="2000" b="0" i="0">
+                <a:solidFill>
+                  <a:srgbClr val="202122"/>
+                </a:solidFill>
+                <a:latin typeface="Calibri"/>
+              </a:rPr>
+              <a:t>Fast, clear drawings for manufacture.</a:t>
+            </a:r>
+          </a:p>
+        </p:txBody>
+      </p:sp>
+      <p:sp>
+        <p:nvSpPr>
+          <p:cNvPr id="10" name="Rounded Rectangle 9"/>
+          <p:cNvSpPr/>
+          <p:nvPr/>
+        </p:nvSpPr>
+        <p:spPr>
+          <a:xfrm>
+            <a:off x="6233007" y="1600200"/>
+            <a:ext cx="5410047" cy="2148840"/>
+          </a:xfrm>
+          <a:prstGeom prst="roundRect">
+            <a:avLst>
+              <a:gd name="adj" fmla="val 6000"/>
+            </a:avLst>
+          </a:prstGeom>
+          <a:solidFill>
+            <a:srgbClr val="EAF3FF"/>
+          </a:solidFill>
+          <a:ln>
+            <a:noFill/>
+          </a:ln>
+          <a:effectLst/>
+        </p:spPr>
+        <p:style>
+          <a:lnRef idx="1">
+            <a:schemeClr val="accent1"/>
+          </a:lnRef>
+          <a:fillRef idx="3">
+            <a:schemeClr val="accent1"/>
+          </a:fillRef>
+          <a:effectRef idx="2">
+            <a:schemeClr val="accent1"/>
+          </a:effectRef>
+          <a:fontRef idx="minor">
+            <a:schemeClr val="lt1"/>
+          </a:fontRef>
+        </p:style>
+        <p:txBody>
+          <a:bodyPr rtlCol="0" anchor="ctr"/>
+          <a:lstStyle/>
+          <a:p/>
+        </p:txBody>
+      </p:sp>
+      <p:sp>
+        <p:nvSpPr>
+          <p:cNvPr id="11" name="Oval 10"/>
+          <p:cNvSpPr/>
+          <p:nvPr/>
+        </p:nvSpPr>
+        <p:spPr>
+          <a:xfrm>
+            <a:off x="6461607" y="1828800"/>
+            <a:ext cx="457200" cy="457200"/>
+          </a:xfrm>
+          <a:prstGeom prst="ellipse">
+            <a:avLst/>
+          </a:prstGeom>
+          <a:solidFill>
+            <a:srgbClr val="E0463A"/>
+          </a:solidFill>
+          <a:ln>
+            <a:noFill/>
+          </a:ln>
+          <a:effectLst/>
+        </p:spPr>
+        <p:style>
+          <a:lnRef idx="1">
+            <a:schemeClr val="accent1"/>
+          </a:lnRef>
+          <a:fillRef idx="3">
+            <a:schemeClr val="accent1"/>
+          </a:fillRef>
+          <a:effectRef idx="2">
+            <a:schemeClr val="accent1"/>
+          </a:effectRef>
+          <a:fontRef idx="minor">
+            <a:schemeClr val="lt1"/>
+          </a:fontRef>
+        </p:style>
+        <p:txBody>
+          <a:bodyPr rtlCol="0" anchor="ctr" lIns="0" rIns="0" tIns="0" bIns="0"/>
+          <a:lstStyle/>
+          <a:p>
+            <a:pPr algn="ctr"/>
+            <a:r>
+              <a:rPr sz="1500" b="1">
+                <a:solidFill>
+                  <a:srgbClr val="FFFFFF"/>
+                </a:solidFill>
+                <a:latin typeface="Calibri"/>
+              </a:rPr>
+              <a:t>2</a:t>
+            </a:r>
+          </a:p>
+        </p:txBody>
+      </p:sp>
+      <p:sp>
+        <p:nvSpPr>
+          <p:cNvPr id="12" name="TextBox 11"/>
+          <p:cNvSpPr txBox="1"/>
+          <p:nvPr/>
+        </p:nvSpPr>
+        <p:spPr>
+          <a:xfrm>
+            <a:off x="7055967" y="1801368"/>
+            <a:ext cx="4404207" cy="512064"/>
+          </a:xfrm>
+          <a:prstGeom prst="rect">
+            <a:avLst/>
+          </a:prstGeom>
+          <a:noFill/>
+        </p:spPr>
+        <p:txBody>
+          <a:bodyPr wrap="square" anchor="ctr" lIns="0" rIns="0" tIns="0" bIns="0"/>
+          <a:lstStyle/>
+          <a:p>
+            <a:pPr algn="l"/>
+            <a:r>
+              <a:rPr sz="1900" b="1" i="0">
+                <a:solidFill>
+                  <a:srgbClr val="03306E"/>
+                </a:solidFill>
+                <a:latin typeface="Calibri"/>
+              </a:rPr>
+              <a:t>3D CAD</a:t>
+            </a:r>
+          </a:p>
+        </p:txBody>
+      </p:sp>
+      <p:sp>
+        <p:nvSpPr>
+          <p:cNvPr id="13" name="TextBox 12"/>
+          <p:cNvSpPr txBox="1"/>
+          <p:nvPr/>
+        </p:nvSpPr>
+        <p:spPr>
+          <a:xfrm>
+            <a:off x="6461607" y="2468880"/>
+            <a:ext cx="4952847" cy="1143000"/>
+          </a:xfrm>
+          <a:prstGeom prst="rect">
+            <a:avLst/>
+          </a:prstGeom>
+          <a:noFill/>
+        </p:spPr>
+        <p:txBody>
+          <a:bodyPr wrap="square" anchor="t" lIns="0" rIns="0" tIns="0" bIns="0"/>
+          <a:lstStyle/>
+          <a:p>
+            <a:pPr algn="l"/>
+            <a:r>
+              <a:rPr sz="2000" b="0" i="0">
+                <a:solidFill>
+                  <a:srgbClr val="202122"/>
+                </a:solidFill>
+                <a:latin typeface="Calibri"/>
+              </a:rPr>
+              <a:t>Solid models, assemblies and clash checks.</a:t>
+            </a:r>
+          </a:p>
+        </p:txBody>
+      </p:sp>
+      <p:sp>
+        <p:nvSpPr>
+          <p:cNvPr id="14" name="Rounded Rectangle 13"/>
+          <p:cNvSpPr/>
+          <p:nvPr/>
+        </p:nvSpPr>
+        <p:spPr>
+          <a:xfrm>
+            <a:off x="548640" y="4023360"/>
+            <a:ext cx="5410047" cy="2148840"/>
+          </a:xfrm>
+          <a:prstGeom prst="roundRect">
+            <a:avLst>
+              <a:gd name="adj" fmla="val 6000"/>
+            </a:avLst>
+          </a:prstGeom>
+          <a:solidFill>
+            <a:srgbClr val="EAF3FF"/>
+          </a:solidFill>
+          <a:ln>
+            <a:noFill/>
+          </a:ln>
+          <a:effectLst/>
+        </p:spPr>
+        <p:style>
+          <a:lnRef idx="1">
+            <a:schemeClr val="accent1"/>
+          </a:lnRef>
+          <a:fillRef idx="3">
+            <a:schemeClr val="accent1"/>
+          </a:fillRef>
+          <a:effectRef idx="2">
+            <a:schemeClr val="accent1"/>
+          </a:effectRef>
+          <a:fontRef idx="minor">
+            <a:schemeClr val="lt1"/>
+          </a:fontRef>
+        </p:style>
+        <p:txBody>
+          <a:bodyPr rtlCol="0" anchor="ctr"/>
+          <a:lstStyle/>
+          <a:p/>
+        </p:txBody>
+      </p:sp>
+      <p:sp>
+        <p:nvSpPr>
+          <p:cNvPr id="15" name="Oval 14"/>
+          <p:cNvSpPr/>
+          <p:nvPr/>
+        </p:nvSpPr>
+        <p:spPr>
+          <a:xfrm>
+            <a:off x="777240" y="4251960"/>
+            <a:ext cx="457200" cy="457200"/>
+          </a:xfrm>
+          <a:prstGeom prst="ellipse">
+            <a:avLst/>
+          </a:prstGeom>
+          <a:solidFill>
+            <a:srgbClr val="E0463A"/>
+          </a:solidFill>
+          <a:ln>
+            <a:noFill/>
+          </a:ln>
+          <a:effectLst/>
+        </p:spPr>
+        <p:style>
+          <a:lnRef idx="1">
+            <a:schemeClr val="accent1"/>
+          </a:lnRef>
+          <a:fillRef idx="3">
+            <a:schemeClr val="accent1"/>
+          </a:fillRef>
+          <a:effectRef idx="2">
+            <a:schemeClr val="accent1"/>
+          </a:effectRef>
+          <a:fontRef idx="minor">
+            <a:schemeClr val="lt1"/>
+          </a:fontRef>
+        </p:style>
+        <p:txBody>
+          <a:bodyPr rtlCol="0" anchor="ctr" lIns="0" rIns="0" tIns="0" bIns="0"/>
+          <a:lstStyle/>
+          <a:p>
+            <a:pPr algn="ctr"/>
+            <a:r>
+              <a:rPr sz="1500" b="1">
+                <a:solidFill>
+                  <a:srgbClr val="FFFFFF"/>
+                </a:solidFill>
+                <a:latin typeface="Calibri"/>
+              </a:rPr>
+              <a:t>3</a:t>
+            </a:r>
+          </a:p>
+        </p:txBody>
+      </p:sp>
+      <p:sp>
+        <p:nvSpPr>
+          <p:cNvPr id="16" name="TextBox 15"/>
+          <p:cNvSpPr txBox="1"/>
+          <p:nvPr/>
+        </p:nvSpPr>
+        <p:spPr>
+          <a:xfrm>
+            <a:off x="1371600" y="4224528"/>
+            <a:ext cx="4404207" cy="512064"/>
+          </a:xfrm>
+          <a:prstGeom prst="rect">
+            <a:avLst/>
+          </a:prstGeom>
+          <a:noFill/>
+        </p:spPr>
+        <p:txBody>
+          <a:bodyPr wrap="square" anchor="ctr" lIns="0" rIns="0" tIns="0" bIns="0"/>
+          <a:lstStyle/>
+          <a:p>
+            <a:pPr algn="l"/>
+            <a:r>
+              <a:rPr sz="1900" b="1" i="0">
+                <a:solidFill>
+                  <a:srgbClr val="03306E"/>
+                </a:solidFill>
+                <a:latin typeface="Calibri"/>
+              </a:rPr>
+              <a:t>CAD to CAM</a:t>
+            </a:r>
+          </a:p>
+        </p:txBody>
+      </p:sp>
+      <p:sp>
+        <p:nvSpPr>
+          <p:cNvPr id="17" name="TextBox 16"/>
+          <p:cNvSpPr txBox="1"/>
+          <p:nvPr/>
+        </p:nvSpPr>
+        <p:spPr>
+          <a:xfrm>
+            <a:off x="777240" y="4892040"/>
+            <a:ext cx="4952847" cy="1143000"/>
+          </a:xfrm>
+          <a:prstGeom prst="rect">
+            <a:avLst/>
+          </a:prstGeom>
+          <a:noFill/>
+        </p:spPr>
+        <p:txBody>
+          <a:bodyPr wrap="square" anchor="t" lIns="0" rIns="0" tIns="0" bIns="0"/>
+          <a:lstStyle/>
+          <a:p>
+            <a:pPr algn="l"/>
+            <a:r>
+              <a:rPr sz="2000" b="0" i="0">
+                <a:solidFill>
+                  <a:srgbClr val="202122"/>
+                </a:solidFill>
+                <a:latin typeface="Calibri"/>
+              </a:rPr>
+              <a:t>Toolpaths sent by direct entry, intranet or Wi-Fi to CNC machines.</a:t>
+            </a:r>
+          </a:p>
+        </p:txBody>
+      </p:sp>
+      <p:sp>
+        <p:nvSpPr>
+          <p:cNvPr id="18" name="Rounded Rectangle 17"/>
+          <p:cNvSpPr/>
+          <p:nvPr/>
+        </p:nvSpPr>
+        <p:spPr>
+          <a:xfrm>
+            <a:off x="6233007" y="4023360"/>
+            <a:ext cx="5410047" cy="2148840"/>
+          </a:xfrm>
+          <a:prstGeom prst="roundRect">
+            <a:avLst>
+              <a:gd name="adj" fmla="val 6000"/>
+            </a:avLst>
+          </a:prstGeom>
+          <a:solidFill>
+            <a:srgbClr val="EAF3FF"/>
+          </a:solidFill>
+          <a:ln>
+            <a:noFill/>
+          </a:ln>
+          <a:effectLst/>
+        </p:spPr>
+        <p:style>
+          <a:lnRef idx="1">
+            <a:schemeClr val="accent1"/>
+          </a:lnRef>
+          <a:fillRef idx="3">
+            <a:schemeClr val="accent1"/>
+          </a:fillRef>
+          <a:effectRef idx="2">
+            <a:schemeClr val="accent1"/>
+          </a:effectRef>
+          <a:fontRef idx="minor">
+            <a:schemeClr val="lt1"/>
+          </a:fontRef>
+        </p:style>
+        <p:txBody>
+          <a:bodyPr rtlCol="0" anchor="ctr"/>
+          <a:lstStyle/>
+          <a:p/>
+        </p:txBody>
+      </p:sp>
+      <p:sp>
+        <p:nvSpPr>
+          <p:cNvPr id="19" name="Oval 18"/>
+          <p:cNvSpPr/>
+          <p:nvPr/>
+        </p:nvSpPr>
+        <p:spPr>
+          <a:xfrm>
+            <a:off x="6461607" y="4251960"/>
+            <a:ext cx="457200" cy="457200"/>
+          </a:xfrm>
+          <a:prstGeom prst="ellipse">
+            <a:avLst/>
+          </a:prstGeom>
+          <a:solidFill>
+            <a:srgbClr val="E0463A"/>
+          </a:solidFill>
+          <a:ln>
+            <a:noFill/>
+          </a:ln>
+          <a:effectLst/>
+        </p:spPr>
+        <p:style>
+          <a:lnRef idx="1">
+            <a:schemeClr val="accent1"/>
+          </a:lnRef>
+          <a:fillRef idx="3">
+            <a:schemeClr val="accent1"/>
+          </a:fillRef>
+          <a:effectRef idx="2">
+            <a:schemeClr val="accent1"/>
+          </a:effectRef>
+          <a:fontRef idx="minor">
+            <a:schemeClr val="lt1"/>
+          </a:fontRef>
+        </p:style>
+        <p:txBody>
+          <a:bodyPr rtlCol="0" anchor="ctr" lIns="0" rIns="0" tIns="0" bIns="0"/>
+          <a:lstStyle/>
+          <a:p>
+            <a:pPr algn="ctr"/>
+            <a:r>
+              <a:rPr sz="1500" b="1">
+                <a:solidFill>
+                  <a:srgbClr val="FFFFFF"/>
+                </a:solidFill>
+                <a:latin typeface="Calibri"/>
+              </a:rPr>
+              <a:t>4</a:t>
+            </a:r>
+          </a:p>
+        </p:txBody>
+      </p:sp>
+      <p:sp>
+        <p:nvSpPr>
+          <p:cNvPr id="20" name="TextBox 19"/>
+          <p:cNvSpPr txBox="1"/>
+          <p:nvPr/>
+        </p:nvSpPr>
+        <p:spPr>
+          <a:xfrm>
+            <a:off x="7055967" y="4224528"/>
+            <a:ext cx="4404207" cy="512064"/>
+          </a:xfrm>
+          <a:prstGeom prst="rect">
+            <a:avLst/>
+          </a:prstGeom>
+          <a:noFill/>
+        </p:spPr>
+        <p:txBody>
+          <a:bodyPr wrap="square" anchor="ctr" lIns="0" rIns="0" tIns="0" bIns="0"/>
+          <a:lstStyle/>
+          <a:p>
+            <a:pPr algn="l"/>
+            <a:r>
+              <a:rPr sz="1900" b="1" i="0">
+                <a:solidFill>
+                  <a:srgbClr val="03306E"/>
+                </a:solidFill>
+                <a:latin typeface="Calibri"/>
+              </a:rPr>
+              <a:t>CAE and visualisation</a:t>
+            </a:r>
+          </a:p>
+        </p:txBody>
+      </p:sp>
+      <p:sp>
+        <p:nvSpPr>
+          <p:cNvPr id="21" name="TextBox 20"/>
+          <p:cNvSpPr txBox="1"/>
+          <p:nvPr/>
+        </p:nvSpPr>
+        <p:spPr>
+          <a:xfrm>
+            <a:off x="6461607" y="4892040"/>
+            <a:ext cx="4952847" cy="1143000"/>
+          </a:xfrm>
+          <a:prstGeom prst="rect">
+            <a:avLst/>
+          </a:prstGeom>
+          <a:noFill/>
+        </p:spPr>
+        <p:txBody>
+          <a:bodyPr wrap="square" anchor="t" lIns="0" rIns="0" tIns="0" bIns="0"/>
+          <a:lstStyle/>
+          <a:p>
+            <a:pPr algn="l"/>
+            <a:r>
+              <a:rPr sz="2000" b="0" i="0">
+                <a:solidFill>
+                  <a:srgbClr val="202122"/>
+                </a:solidFill>
+                <a:latin typeface="Calibri"/>
+              </a:rPr>
+              <a:t>Simulate assembly performance; render for customers.</a:t>
+            </a:r>
+          </a:p>
+        </p:txBody>
+      </p:sp>
+    </p:spTree>
+  </p:cSld>
+  <p:clrMapOvr>
+    <a:masterClrMapping/>
+  </p:clrMapOvr>
+</p:sld>
+</file>
+
+<file path=ppt/slides/slide11.xml><?xml version="1.0" encoding="utf-8"?>
+<p:sld xmlns:a="http://schemas.openxmlformats.org/drawingml/2006/main" xmlns:p="http://schemas.openxmlformats.org/presentationml/2006/main" xmlns:r="http://schemas.openxmlformats.org/officeDocument/2006/relationships">
+  <p:cSld>
+    <p:bg>
+      <p:bgPr>
+        <a:solidFill>
+          <a:srgbClr val="FFFFFF"/>
+        </a:solidFill>
+        <a:effectLst/>
+      </p:bgPr>
+    </p:bg>
+    <p:spTree>
+      <p:nvGrpSpPr>
+        <p:cNvPr id="1" name=""/>
+        <p:cNvGrpSpPr/>
+        <p:nvPr/>
+      </p:nvGrpSpPr>
+      <p:grpSpPr/>
+      <p:sp>
+        <p:nvSpPr>
+          <p:cNvPr id="2" name="TextBox 1"/>
+          <p:cNvSpPr txBox="1"/>
+          <p:nvPr/>
+        </p:nvSpPr>
+        <p:spPr>
+          <a:xfrm>
+            <a:off x="548640" y="320040"/>
+            <a:ext cx="11094415" cy="274320"/>
+          </a:xfrm>
+          <a:prstGeom prst="rect">
+            <a:avLst/>
+          </a:prstGeom>
+          <a:noFill/>
+        </p:spPr>
+        <p:txBody>
+          <a:bodyPr wrap="square" anchor="t" lIns="0" rIns="0" tIns="0" bIns="0"/>
+          <a:lstStyle/>
+          <a:p>
+            <a:pPr algn="l"/>
+            <a:r>
+              <a:rPr sz="1100" b="1" i="0">
+                <a:solidFill>
+                  <a:srgbClr val="54595D"/>
+                </a:solidFill>
+                <a:latin typeface="Calibri"/>
+              </a:rPr>
+              <a:t>MECHANICAL ENGINEERING  ·  Mechanical: Knowledge criteria</a:t>
+            </a:r>
+          </a:p>
+        </p:txBody>
+      </p:sp>
+      <p:sp>
+        <p:nvSpPr>
+          <p:cNvPr id="3" name="TextBox 2"/>
+          <p:cNvSpPr txBox="1"/>
+          <p:nvPr/>
+        </p:nvSpPr>
+        <p:spPr>
+          <a:xfrm>
+            <a:off x="548640" y="566928"/>
+            <a:ext cx="11094415" cy="822960"/>
+          </a:xfrm>
+          <a:prstGeom prst="rect">
+            <a:avLst/>
+          </a:prstGeom>
+          <a:noFill/>
+        </p:spPr>
+        <p:txBody>
+          <a:bodyPr wrap="square" anchor="ctr" lIns="0" rIns="0" tIns="0" bIns="0"/>
+          <a:lstStyle/>
+          <a:p>
+            <a:pPr algn="l"/>
+            <a:r>
+              <a:rPr sz="3200" b="1" i="0">
+                <a:solidFill>
+                  <a:srgbClr val="03306E"/>
+                </a:solidFill>
+                <a:latin typeface="Cambria"/>
+              </a:rPr>
+              <a:t>Check your understanding</a:t>
+            </a:r>
+          </a:p>
+        </p:txBody>
+      </p:sp>
+      <p:sp>
+        <p:nvSpPr>
+          <p:cNvPr id="4" name="TextBox 3"/>
+          <p:cNvSpPr txBox="1"/>
+          <p:nvPr/>
+        </p:nvSpPr>
+        <p:spPr>
+          <a:xfrm>
+            <a:off x="548640" y="6446520"/>
+            <a:ext cx="8229600" cy="274320"/>
+          </a:xfrm>
+          <a:prstGeom prst="rect">
+            <a:avLst/>
+          </a:prstGeom>
+          <a:noFill/>
+        </p:spPr>
+        <p:txBody>
+          <a:bodyPr wrap="square" anchor="t" lIns="0" rIns="0" tIns="0" bIns="0"/>
+          <a:lstStyle/>
+          <a:p>
+            <a:pPr algn="l"/>
+            <a:r>
+              <a:rPr sz="1000" b="0" i="0">
+                <a:solidFill>
+                  <a:srgbClr val="54595D"/>
+                </a:solidFill>
+                <a:latin typeface="Calibri"/>
+              </a:rPr>
+              <a:t>Design and Development for Engineering and Manufacturing T Level  ·  Mechanical Drawings, Standards and Communication</a:t>
+            </a:r>
+          </a:p>
+        </p:txBody>
+      </p:sp>
+      <p:sp>
+        <p:nvSpPr>
+          <p:cNvPr id="5" name="TextBox 4"/>
+          <p:cNvSpPr txBox="1"/>
+          <p:nvPr/>
+        </p:nvSpPr>
+        <p:spPr>
+          <a:xfrm>
+            <a:off x="10728655" y="6446520"/>
+            <a:ext cx="914400" cy="274320"/>
+          </a:xfrm>
+          <a:prstGeom prst="rect">
+            <a:avLst/>
+          </a:prstGeom>
+          <a:noFill/>
+        </p:spPr>
+        <p:txBody>
+          <a:bodyPr wrap="square" anchor="t" lIns="0" rIns="0" tIns="0" bIns="0"/>
+          <a:lstStyle/>
+          <a:p>
+            <a:pPr algn="r"/>
+            <a:r>
+              <a:rPr sz="1000" b="0" i="0">
+                <a:solidFill>
+                  <a:srgbClr val="54595D"/>
+                </a:solidFill>
+                <a:latin typeface="Calibri"/>
+              </a:rPr>
+              <a:t>11</a:t>
+            </a:r>
+          </a:p>
+        </p:txBody>
+      </p:sp>
+      <p:sp>
+        <p:nvSpPr>
+          <p:cNvPr id="6" name="Oval 5"/>
+          <p:cNvSpPr/>
+          <p:nvPr/>
+        </p:nvSpPr>
+        <p:spPr>
+          <a:xfrm>
+            <a:off x="548640" y="1618488"/>
+            <a:ext cx="411480" cy="411480"/>
+          </a:xfrm>
+          <a:prstGeom prst="ellipse">
+            <a:avLst/>
+          </a:prstGeom>
+          <a:solidFill>
+            <a:srgbClr val="E0463A"/>
+          </a:solidFill>
+          <a:ln>
+            <a:noFill/>
+          </a:ln>
+          <a:effectLst/>
+        </p:spPr>
+        <p:style>
+          <a:lnRef idx="1">
+            <a:schemeClr val="accent1"/>
+          </a:lnRef>
+          <a:fillRef idx="3">
+            <a:schemeClr val="accent1"/>
+          </a:fillRef>
+          <a:effectRef idx="2">
+            <a:schemeClr val="accent1"/>
+          </a:effectRef>
+          <a:fontRef idx="minor">
+            <a:schemeClr val="lt1"/>
+          </a:fontRef>
+        </p:style>
+        <p:txBody>
+          <a:bodyPr rtlCol="0" anchor="ctr" lIns="0" rIns="0" tIns="0" bIns="0"/>
+          <a:lstStyle/>
+          <a:p>
+            <a:pPr algn="ctr"/>
+            <a:r>
+              <a:rPr sz="1400" b="1">
+                <a:solidFill>
+                  <a:srgbClr val="FFFFFF"/>
+                </a:solidFill>
+                <a:latin typeface="Calibri"/>
+              </a:rPr>
+              <a:t>1</a:t>
+            </a:r>
+          </a:p>
+        </p:txBody>
+      </p:sp>
+      <p:sp>
+        <p:nvSpPr>
+          <p:cNvPr id="7" name="TextBox 6"/>
+          <p:cNvSpPr txBox="1"/>
+          <p:nvPr/>
+        </p:nvSpPr>
+        <p:spPr>
+          <a:xfrm>
+            <a:off x="1234440" y="1600200"/>
+            <a:ext cx="10408615" cy="1030986"/>
+          </a:xfrm>
+          <a:prstGeom prst="rect">
+            <a:avLst/>
+          </a:prstGeom>
+          <a:noFill/>
+        </p:spPr>
+        <p:txBody>
+          <a:bodyPr wrap="square" anchor="t" lIns="0" rIns="0" tIns="0" bIns="0"/>
+          <a:lstStyle/>
+          <a:p>
+            <a:pPr algn="l"/>
+            <a:r>
+              <a:rPr sz="2200" b="0" i="0">
+                <a:solidFill>
+                  <a:srgbClr val="202122"/>
+                </a:solidFill>
+                <a:latin typeface="Calibri"/>
+              </a:rPr>
+              <a:t>Which standard covers technical drawings?</a:t>
+            </a:r>
+          </a:p>
+        </p:txBody>
+      </p:sp>
+      <p:sp>
+        <p:nvSpPr>
+          <p:cNvPr id="8" name="Oval 7"/>
+          <p:cNvSpPr/>
+          <p:nvPr/>
+        </p:nvSpPr>
+        <p:spPr>
+          <a:xfrm>
+            <a:off x="548640" y="2814066"/>
+            <a:ext cx="411480" cy="411480"/>
+          </a:xfrm>
+          <a:prstGeom prst="ellipse">
+            <a:avLst/>
+          </a:prstGeom>
+          <a:solidFill>
+            <a:srgbClr val="E0463A"/>
+          </a:solidFill>
+          <a:ln>
+            <a:noFill/>
+          </a:ln>
+          <a:effectLst/>
+        </p:spPr>
+        <p:style>
+          <a:lnRef idx="1">
+            <a:schemeClr val="accent1"/>
+          </a:lnRef>
+          <a:fillRef idx="3">
+            <a:schemeClr val="accent1"/>
+          </a:fillRef>
+          <a:effectRef idx="2">
+            <a:schemeClr val="accent1"/>
+          </a:effectRef>
+          <a:fontRef idx="minor">
+            <a:schemeClr val="lt1"/>
+          </a:fontRef>
+        </p:style>
+        <p:txBody>
+          <a:bodyPr rtlCol="0" anchor="ctr" lIns="0" rIns="0" tIns="0" bIns="0"/>
+          <a:lstStyle/>
+          <a:p>
+            <a:pPr algn="ctr"/>
+            <a:r>
+              <a:rPr sz="1400" b="1">
+                <a:solidFill>
+                  <a:srgbClr val="FFFFFF"/>
+                </a:solidFill>
+                <a:latin typeface="Calibri"/>
+              </a:rPr>
+              <a:t>2</a:t>
+            </a:r>
+          </a:p>
+        </p:txBody>
+      </p:sp>
+      <p:sp>
+        <p:nvSpPr>
+          <p:cNvPr id="9" name="TextBox 8"/>
+          <p:cNvSpPr txBox="1"/>
+          <p:nvPr/>
+        </p:nvSpPr>
+        <p:spPr>
+          <a:xfrm>
+            <a:off x="1234440" y="2795778"/>
+            <a:ext cx="10408615" cy="1030986"/>
+          </a:xfrm>
+          <a:prstGeom prst="rect">
+            <a:avLst/>
+          </a:prstGeom>
+          <a:noFill/>
+        </p:spPr>
+        <p:txBody>
+          <a:bodyPr wrap="square" anchor="t" lIns="0" rIns="0" tIns="0" bIns="0"/>
+          <a:lstStyle/>
+          <a:p>
+            <a:pPr algn="l"/>
+            <a:r>
+              <a:rPr sz="2200" b="0" i="0">
+                <a:solidFill>
+                  <a:srgbClr val="202122"/>
+                </a:solidFill>
+                <a:latin typeface="Calibri"/>
+              </a:rPr>
+              <a:t>What does a section view show?</a:t>
+            </a:r>
+          </a:p>
+        </p:txBody>
+      </p:sp>
+      <p:sp>
+        <p:nvSpPr>
+          <p:cNvPr id="10" name="Oval 9"/>
+          <p:cNvSpPr/>
+          <p:nvPr/>
+        </p:nvSpPr>
+        <p:spPr>
+          <a:xfrm>
+            <a:off x="548640" y="4009644"/>
+            <a:ext cx="411480" cy="411480"/>
+          </a:xfrm>
+          <a:prstGeom prst="ellipse">
+            <a:avLst/>
+          </a:prstGeom>
+          <a:solidFill>
+            <a:srgbClr val="E0463A"/>
+          </a:solidFill>
+          <a:ln>
+            <a:noFill/>
+          </a:ln>
+          <a:effectLst/>
+        </p:spPr>
+        <p:style>
+          <a:lnRef idx="1">
+            <a:schemeClr val="accent1"/>
+          </a:lnRef>
+          <a:fillRef idx="3">
+            <a:schemeClr val="accent1"/>
+          </a:fillRef>
+          <a:effectRef idx="2">
+            <a:schemeClr val="accent1"/>
+          </a:effectRef>
+          <a:fontRef idx="minor">
+            <a:schemeClr val="lt1"/>
+          </a:fontRef>
+        </p:style>
+        <p:txBody>
+          <a:bodyPr rtlCol="0" anchor="ctr" lIns="0" rIns="0" tIns="0" bIns="0"/>
+          <a:lstStyle/>
+          <a:p>
+            <a:pPr algn="ctr"/>
+            <a:r>
+              <a:rPr sz="1400" b="1">
+                <a:solidFill>
+                  <a:srgbClr val="FFFFFF"/>
+                </a:solidFill>
+                <a:latin typeface="Calibri"/>
+              </a:rPr>
+              <a:t>3</a:t>
+            </a:r>
+          </a:p>
+        </p:txBody>
+      </p:sp>
+      <p:sp>
+        <p:nvSpPr>
+          <p:cNvPr id="11" name="TextBox 10"/>
+          <p:cNvSpPr txBox="1"/>
+          <p:nvPr/>
+        </p:nvSpPr>
+        <p:spPr>
+          <a:xfrm>
+            <a:off x="1234440" y="3991356"/>
+            <a:ext cx="10408615" cy="1030986"/>
+          </a:xfrm>
+          <a:prstGeom prst="rect">
+            <a:avLst/>
+          </a:prstGeom>
+          <a:noFill/>
+        </p:spPr>
+        <p:txBody>
+          <a:bodyPr wrap="square" anchor="t" lIns="0" rIns="0" tIns="0" bIns="0"/>
+          <a:lstStyle/>
+          <a:p>
+            <a:pPr algn="l"/>
+            <a:r>
+              <a:rPr sz="2200" b="0" i="0">
+                <a:solidFill>
+                  <a:srgbClr val="202122"/>
+                </a:solidFill>
+                <a:latin typeface="Calibri"/>
+              </a:rPr>
+              <a:t>What is CAE used for?</a:t>
+            </a:r>
+          </a:p>
+        </p:txBody>
+      </p:sp>
+      <p:sp>
+        <p:nvSpPr>
+          <p:cNvPr id="12" name="Oval 11"/>
+          <p:cNvSpPr/>
+          <p:nvPr/>
+        </p:nvSpPr>
+        <p:spPr>
+          <a:xfrm>
+            <a:off x="548640" y="5205221"/>
+            <a:ext cx="411480" cy="411480"/>
+          </a:xfrm>
+          <a:prstGeom prst="ellipse">
+            <a:avLst/>
+          </a:prstGeom>
+          <a:solidFill>
+            <a:srgbClr val="E0463A"/>
+          </a:solidFill>
+          <a:ln>
+            <a:noFill/>
+          </a:ln>
+          <a:effectLst/>
+        </p:spPr>
+        <p:style>
+          <a:lnRef idx="1">
+            <a:schemeClr val="accent1"/>
+          </a:lnRef>
+          <a:fillRef idx="3">
+            <a:schemeClr val="accent1"/>
+          </a:fillRef>
+          <a:effectRef idx="2">
+            <a:schemeClr val="accent1"/>
+          </a:effectRef>
+          <a:fontRef idx="minor">
+            <a:schemeClr val="lt1"/>
+          </a:fontRef>
+        </p:style>
+        <p:txBody>
+          <a:bodyPr rtlCol="0" anchor="ctr" lIns="0" rIns="0" tIns="0" bIns="0"/>
+          <a:lstStyle/>
+          <a:p>
+            <a:pPr algn="ctr"/>
+            <a:r>
+              <a:rPr sz="1400" b="1">
+                <a:solidFill>
+                  <a:srgbClr val="FFFFFF"/>
+                </a:solidFill>
+                <a:latin typeface="Calibri"/>
+              </a:rPr>
+              <a:t>4</a:t>
+            </a:r>
+          </a:p>
+        </p:txBody>
+      </p:sp>
+      <p:sp>
+        <p:nvSpPr>
+          <p:cNvPr id="13" name="TextBox 12"/>
+          <p:cNvSpPr txBox="1"/>
+          <p:nvPr/>
+        </p:nvSpPr>
+        <p:spPr>
+          <a:xfrm>
+            <a:off x="1234440" y="5186933"/>
+            <a:ext cx="10408615" cy="1030986"/>
+          </a:xfrm>
+          <a:prstGeom prst="rect">
+            <a:avLst/>
+          </a:prstGeom>
+          <a:noFill/>
+        </p:spPr>
+        <p:txBody>
+          <a:bodyPr wrap="square" anchor="t" lIns="0" rIns="0" tIns="0" bIns="0"/>
+          <a:lstStyle/>
+          <a:p>
+            <a:pPr algn="l"/>
+            <a:r>
+              <a:rPr sz="2200" b="0" i="0">
+                <a:solidFill>
+                  <a:srgbClr val="202122"/>
+                </a:solidFill>
+                <a:latin typeface="Calibri"/>
+              </a:rPr>
+              <a:t>Who is IMechE?</a:t>
+            </a:r>
+          </a:p>
+        </p:txBody>
+      </p:sp>
+    </p:spTree>
+  </p:cSld>
+  <p:clrMapOvr>
+    <a:masterClrMapping/>
+  </p:clrMapOvr>
+</p:sld>
+</file>
+
+<file path=ppt/slides/slide12.xml><?xml version="1.0" encoding="utf-8"?>
+<p:sld xmlns:a="http://schemas.openxmlformats.org/drawingml/2006/main" xmlns:p="http://schemas.openxmlformats.org/presentationml/2006/main" xmlns:r="http://schemas.openxmlformats.org/officeDocument/2006/relationships">
+  <p:cSld>
+    <p:bg>
+      <p:bgPr>
+        <a:solidFill>
+          <a:srgbClr val="FFFFFF"/>
+        </a:solidFill>
+        <a:effectLst/>
+      </p:bgPr>
+    </p:bg>
+    <p:spTree>
+      <p:nvGrpSpPr>
+        <p:cNvPr id="1" name=""/>
+        <p:cNvGrpSpPr/>
+        <p:nvPr/>
+      </p:nvGrpSpPr>
+      <p:grpSpPr/>
+      <p:sp>
+        <p:nvSpPr>
+          <p:cNvPr id="2" name="TextBox 1"/>
+          <p:cNvSpPr txBox="1"/>
+          <p:nvPr/>
+        </p:nvSpPr>
+        <p:spPr>
+          <a:xfrm>
+            <a:off x="548640" y="320040"/>
+            <a:ext cx="11094415" cy="274320"/>
+          </a:xfrm>
+          <a:prstGeom prst="rect">
+            <a:avLst/>
+          </a:prstGeom>
+          <a:noFill/>
+        </p:spPr>
+        <p:txBody>
+          <a:bodyPr wrap="square" anchor="t" lIns="0" rIns="0" tIns="0" bIns="0"/>
+          <a:lstStyle/>
+          <a:p>
+            <a:pPr algn="l"/>
+            <a:r>
+              <a:rPr sz="1100" b="1" i="0">
+                <a:solidFill>
+                  <a:srgbClr val="54595D"/>
+                </a:solidFill>
+                <a:latin typeface="Calibri"/>
+              </a:rPr>
+              <a:t>MECHANICAL ENGINEERING  ·  Mechanical: Knowledge criteria</a:t>
+            </a:r>
+          </a:p>
+        </p:txBody>
+      </p:sp>
+      <p:sp>
+        <p:nvSpPr>
+          <p:cNvPr id="3" name="TextBox 2"/>
+          <p:cNvSpPr txBox="1"/>
+          <p:nvPr/>
+        </p:nvSpPr>
+        <p:spPr>
+          <a:xfrm>
+            <a:off x="548640" y="566928"/>
+            <a:ext cx="11094415" cy="822960"/>
+          </a:xfrm>
+          <a:prstGeom prst="rect">
+            <a:avLst/>
+          </a:prstGeom>
+          <a:noFill/>
+        </p:spPr>
+        <p:txBody>
+          <a:bodyPr wrap="square" anchor="ctr" lIns="0" rIns="0" tIns="0" bIns="0"/>
+          <a:lstStyle/>
+          <a:p>
+            <a:pPr algn="l"/>
+            <a:r>
+              <a:rPr sz="3200" b="1" i="0">
+                <a:solidFill>
+                  <a:srgbClr val="03306E"/>
+                </a:solidFill>
+                <a:latin typeface="Cambria"/>
+              </a:rPr>
+              <a:t>Answers</a:t>
+            </a:r>
+          </a:p>
+        </p:txBody>
+      </p:sp>
+      <p:sp>
+        <p:nvSpPr>
+          <p:cNvPr id="4" name="TextBox 3"/>
+          <p:cNvSpPr txBox="1"/>
+          <p:nvPr/>
+        </p:nvSpPr>
+        <p:spPr>
+          <a:xfrm>
+            <a:off x="548640" y="6446520"/>
+            <a:ext cx="8229600" cy="274320"/>
+          </a:xfrm>
+          <a:prstGeom prst="rect">
+            <a:avLst/>
+          </a:prstGeom>
+          <a:noFill/>
+        </p:spPr>
+        <p:txBody>
+          <a:bodyPr wrap="square" anchor="t" lIns="0" rIns="0" tIns="0" bIns="0"/>
+          <a:lstStyle/>
+          <a:p>
+            <a:pPr algn="l"/>
+            <a:r>
+              <a:rPr sz="1000" b="0" i="0">
+                <a:solidFill>
+                  <a:srgbClr val="54595D"/>
+                </a:solidFill>
+                <a:latin typeface="Calibri"/>
+              </a:rPr>
+              <a:t>Design and Development for Engineering and Manufacturing T Level  ·  Mechanical Drawings, Standards and Communication</a:t>
+            </a:r>
+          </a:p>
+        </p:txBody>
+      </p:sp>
+      <p:sp>
+        <p:nvSpPr>
+          <p:cNvPr id="5" name="TextBox 4"/>
+          <p:cNvSpPr txBox="1"/>
+          <p:nvPr/>
+        </p:nvSpPr>
+        <p:spPr>
+          <a:xfrm>
+            <a:off x="10728655" y="6446520"/>
+            <a:ext cx="914400" cy="274320"/>
+          </a:xfrm>
+          <a:prstGeom prst="rect">
+            <a:avLst/>
+          </a:prstGeom>
+          <a:noFill/>
+        </p:spPr>
+        <p:txBody>
+          <a:bodyPr wrap="square" anchor="t" lIns="0" rIns="0" tIns="0" bIns="0"/>
+          <a:lstStyle/>
+          <a:p>
+            <a:pPr algn="r"/>
+            <a:r>
+              <a:rPr sz="1000" b="0" i="0">
+                <a:solidFill>
+                  <a:srgbClr val="54595D"/>
+                </a:solidFill>
+                <a:latin typeface="Calibri"/>
+              </a:rPr>
+              <a:t>12</a:t>
+            </a:r>
+          </a:p>
+        </p:txBody>
+      </p:sp>
+      <p:sp>
+        <p:nvSpPr>
+          <p:cNvPr id="6" name="Oval 5"/>
+          <p:cNvSpPr/>
+          <p:nvPr/>
+        </p:nvSpPr>
+        <p:spPr>
+          <a:xfrm>
+            <a:off x="548640" y="1618488"/>
+            <a:ext cx="411480" cy="411480"/>
+          </a:xfrm>
+          <a:prstGeom prst="ellipse">
+            <a:avLst/>
+          </a:prstGeom>
+          <a:solidFill>
+            <a:srgbClr val="E0463A"/>
+          </a:solidFill>
+          <a:ln>
+            <a:noFill/>
+          </a:ln>
+          <a:effectLst/>
+        </p:spPr>
+        <p:style>
+          <a:lnRef idx="1">
+            <a:schemeClr val="accent1"/>
+          </a:lnRef>
+          <a:fillRef idx="3">
+            <a:schemeClr val="accent1"/>
+          </a:fillRef>
+          <a:effectRef idx="2">
+            <a:schemeClr val="accent1"/>
+          </a:effectRef>
+          <a:fontRef idx="minor">
+            <a:schemeClr val="lt1"/>
+          </a:fontRef>
+        </p:style>
+        <p:txBody>
+          <a:bodyPr rtlCol="0" anchor="ctr" lIns="0" rIns="0" tIns="0" bIns="0"/>
+          <a:lstStyle/>
+          <a:p>
+            <a:pPr algn="ctr"/>
+            <a:r>
+              <a:rPr sz="1400" b="1">
+                <a:solidFill>
+                  <a:srgbClr val="FFFFFF"/>
+                </a:solidFill>
+                <a:latin typeface="Calibri"/>
+              </a:rPr>
+              <a:t>1</a:t>
+            </a:r>
+          </a:p>
+        </p:txBody>
+      </p:sp>
+      <p:sp>
+        <p:nvSpPr>
+          <p:cNvPr id="7" name="TextBox 6"/>
+          <p:cNvSpPr txBox="1"/>
+          <p:nvPr/>
+        </p:nvSpPr>
+        <p:spPr>
+          <a:xfrm>
+            <a:off x="1234440" y="1600200"/>
+            <a:ext cx="10408615" cy="1030986"/>
+          </a:xfrm>
+          <a:prstGeom prst="rect">
+            <a:avLst/>
+          </a:prstGeom>
+          <a:noFill/>
+        </p:spPr>
+        <p:txBody>
+          <a:bodyPr wrap="square" anchor="t" lIns="0" rIns="0" tIns="0" bIns="0"/>
+          <a:lstStyle/>
+          <a:p>
+            <a:pPr algn="l"/>
+            <a:r>
+              <a:rPr sz="1800" b="0" i="0">
+                <a:solidFill>
+                  <a:srgbClr val="54595D"/>
+                </a:solidFill>
+                <a:latin typeface="Calibri"/>
+              </a:rPr>
+              <a:t>Which standard covers technical drawings?</a:t>
+            </a:r>
+          </a:p>
+          <a:p>
+            <a:r>
+              <a:rPr sz="1800" b="1">
+                <a:solidFill>
+                  <a:srgbClr val="03306E"/>
+                </a:solidFill>
+                <a:latin typeface="Calibri"/>
+              </a:rPr>
+              <a:t>BS EN 8888.</a:t>
+            </a:r>
+          </a:p>
+        </p:txBody>
+      </p:sp>
+      <p:sp>
+        <p:nvSpPr>
+          <p:cNvPr id="8" name="Oval 7"/>
+          <p:cNvSpPr/>
+          <p:nvPr/>
+        </p:nvSpPr>
+        <p:spPr>
+          <a:xfrm>
+            <a:off x="548640" y="2814066"/>
+            <a:ext cx="411480" cy="411480"/>
+          </a:xfrm>
+          <a:prstGeom prst="ellipse">
+            <a:avLst/>
+          </a:prstGeom>
+          <a:solidFill>
+            <a:srgbClr val="E0463A"/>
+          </a:solidFill>
+          <a:ln>
+            <a:noFill/>
+          </a:ln>
+          <a:effectLst/>
+        </p:spPr>
+        <p:style>
+          <a:lnRef idx="1">
+            <a:schemeClr val="accent1"/>
+          </a:lnRef>
+          <a:fillRef idx="3">
+            <a:schemeClr val="accent1"/>
+          </a:fillRef>
+          <a:effectRef idx="2">
+            <a:schemeClr val="accent1"/>
+          </a:effectRef>
+          <a:fontRef idx="minor">
+            <a:schemeClr val="lt1"/>
+          </a:fontRef>
+        </p:style>
+        <p:txBody>
+          <a:bodyPr rtlCol="0" anchor="ctr" lIns="0" rIns="0" tIns="0" bIns="0"/>
+          <a:lstStyle/>
+          <a:p>
+            <a:pPr algn="ctr"/>
+            <a:r>
+              <a:rPr sz="1400" b="1">
+                <a:solidFill>
+                  <a:srgbClr val="FFFFFF"/>
+                </a:solidFill>
+                <a:latin typeface="Calibri"/>
+              </a:rPr>
+              <a:t>2</a:t>
+            </a:r>
+          </a:p>
+        </p:txBody>
+      </p:sp>
+      <p:sp>
+        <p:nvSpPr>
+          <p:cNvPr id="9" name="TextBox 8"/>
+          <p:cNvSpPr txBox="1"/>
+          <p:nvPr/>
+        </p:nvSpPr>
+        <p:spPr>
+          <a:xfrm>
+            <a:off x="1234440" y="2795778"/>
+            <a:ext cx="10408615" cy="1030986"/>
+          </a:xfrm>
+          <a:prstGeom prst="rect">
+            <a:avLst/>
+          </a:prstGeom>
+          <a:noFill/>
+        </p:spPr>
+        <p:txBody>
+          <a:bodyPr wrap="square" anchor="t" lIns="0" rIns="0" tIns="0" bIns="0"/>
+          <a:lstStyle/>
+          <a:p>
+            <a:pPr algn="l"/>
+            <a:r>
+              <a:rPr sz="1800" b="0" i="0">
+                <a:solidFill>
+                  <a:srgbClr val="54595D"/>
+                </a:solidFill>
+                <a:latin typeface="Calibri"/>
+              </a:rPr>
+              <a:t>What does a section view show?</a:t>
+            </a:r>
+          </a:p>
+          <a:p>
+            <a:r>
+              <a:rPr sz="1800" b="1">
+                <a:solidFill>
+                  <a:srgbClr val="03306E"/>
+                </a:solidFill>
+                <a:latin typeface="Calibri"/>
+              </a:rPr>
+              <a:t>The inside of a part as if cut through, with hatching.</a:t>
+            </a:r>
+          </a:p>
+        </p:txBody>
+      </p:sp>
+      <p:sp>
+        <p:nvSpPr>
+          <p:cNvPr id="10" name="Oval 9"/>
+          <p:cNvSpPr/>
+          <p:nvPr/>
+        </p:nvSpPr>
+        <p:spPr>
+          <a:xfrm>
+            <a:off x="548640" y="4009644"/>
+            <a:ext cx="411480" cy="411480"/>
+          </a:xfrm>
+          <a:prstGeom prst="ellipse">
+            <a:avLst/>
+          </a:prstGeom>
+          <a:solidFill>
+            <a:srgbClr val="E0463A"/>
+          </a:solidFill>
+          <a:ln>
+            <a:noFill/>
+          </a:ln>
+          <a:effectLst/>
+        </p:spPr>
+        <p:style>
+          <a:lnRef idx="1">
+            <a:schemeClr val="accent1"/>
+          </a:lnRef>
+          <a:fillRef idx="3">
+            <a:schemeClr val="accent1"/>
+          </a:fillRef>
+          <a:effectRef idx="2">
+            <a:schemeClr val="accent1"/>
+          </a:effectRef>
+          <a:fontRef idx="minor">
+            <a:schemeClr val="lt1"/>
+          </a:fontRef>
+        </p:style>
+        <p:txBody>
+          <a:bodyPr rtlCol="0" anchor="ctr" lIns="0" rIns="0" tIns="0" bIns="0"/>
+          <a:lstStyle/>
+          <a:p>
+            <a:pPr algn="ctr"/>
+            <a:r>
+              <a:rPr sz="1400" b="1">
+                <a:solidFill>
+                  <a:srgbClr val="FFFFFF"/>
+                </a:solidFill>
+                <a:latin typeface="Calibri"/>
+              </a:rPr>
+              <a:t>3</a:t>
+            </a:r>
+          </a:p>
+        </p:txBody>
+      </p:sp>
+      <p:sp>
+        <p:nvSpPr>
+          <p:cNvPr id="11" name="TextBox 10"/>
+          <p:cNvSpPr txBox="1"/>
+          <p:nvPr/>
+        </p:nvSpPr>
+        <p:spPr>
+          <a:xfrm>
+            <a:off x="1234440" y="3991356"/>
+            <a:ext cx="10408615" cy="1030986"/>
+          </a:xfrm>
+          <a:prstGeom prst="rect">
+            <a:avLst/>
+          </a:prstGeom>
+          <a:noFill/>
+        </p:spPr>
+        <p:txBody>
+          <a:bodyPr wrap="square" anchor="t" lIns="0" rIns="0" tIns="0" bIns="0"/>
+          <a:lstStyle/>
+          <a:p>
+            <a:pPr algn="l"/>
+            <a:r>
+              <a:rPr sz="1800" b="0" i="0">
+                <a:solidFill>
+                  <a:srgbClr val="54595D"/>
+                </a:solidFill>
+                <a:latin typeface="Calibri"/>
+              </a:rPr>
+              <a:t>What is CAE used for?</a:t>
+            </a:r>
+          </a:p>
+          <a:p>
+            <a:r>
+              <a:rPr sz="1800" b="1">
+                <a:solidFill>
+                  <a:srgbClr val="03306E"/>
+                </a:solidFill>
+                <a:latin typeface="Calibri"/>
+              </a:rPr>
+              <a:t>Simulating and analysing how a design will perform.</a:t>
+            </a:r>
+          </a:p>
+        </p:txBody>
+      </p:sp>
+      <p:sp>
+        <p:nvSpPr>
+          <p:cNvPr id="12" name="Oval 11"/>
+          <p:cNvSpPr/>
+          <p:nvPr/>
+        </p:nvSpPr>
+        <p:spPr>
+          <a:xfrm>
+            <a:off x="548640" y="5205221"/>
+            <a:ext cx="411480" cy="411480"/>
+          </a:xfrm>
+          <a:prstGeom prst="ellipse">
+            <a:avLst/>
+          </a:prstGeom>
+          <a:solidFill>
+            <a:srgbClr val="E0463A"/>
+          </a:solidFill>
+          <a:ln>
+            <a:noFill/>
+          </a:ln>
+          <a:effectLst/>
+        </p:spPr>
+        <p:style>
+          <a:lnRef idx="1">
+            <a:schemeClr val="accent1"/>
+          </a:lnRef>
+          <a:fillRef idx="3">
+            <a:schemeClr val="accent1"/>
+          </a:fillRef>
+          <a:effectRef idx="2">
+            <a:schemeClr val="accent1"/>
+          </a:effectRef>
+          <a:fontRef idx="minor">
+            <a:schemeClr val="lt1"/>
+          </a:fontRef>
+        </p:style>
+        <p:txBody>
+          <a:bodyPr rtlCol="0" anchor="ctr" lIns="0" rIns="0" tIns="0" bIns="0"/>
+          <a:lstStyle/>
+          <a:p>
+            <a:pPr algn="ctr"/>
+            <a:r>
+              <a:rPr sz="1400" b="1">
+                <a:solidFill>
+                  <a:srgbClr val="FFFFFF"/>
+                </a:solidFill>
+                <a:latin typeface="Calibri"/>
+              </a:rPr>
+              <a:t>4</a:t>
+            </a:r>
+          </a:p>
+        </p:txBody>
+      </p:sp>
+      <p:sp>
+        <p:nvSpPr>
+          <p:cNvPr id="13" name="TextBox 12"/>
+          <p:cNvSpPr txBox="1"/>
+          <p:nvPr/>
+        </p:nvSpPr>
+        <p:spPr>
+          <a:xfrm>
+            <a:off x="1234440" y="5186933"/>
+            <a:ext cx="10408615" cy="1030986"/>
+          </a:xfrm>
+          <a:prstGeom prst="rect">
+            <a:avLst/>
+          </a:prstGeom>
+          <a:noFill/>
+        </p:spPr>
+        <p:txBody>
+          <a:bodyPr wrap="square" anchor="t" lIns="0" rIns="0" tIns="0" bIns="0"/>
+          <a:lstStyle/>
+          <a:p>
+            <a:pPr algn="l"/>
+            <a:r>
+              <a:rPr sz="1800" b="0" i="0">
+                <a:solidFill>
+                  <a:srgbClr val="54595D"/>
+                </a:solidFill>
+                <a:latin typeface="Calibri"/>
+              </a:rPr>
+              <a:t>Who is IMechE?</a:t>
+            </a:r>
+          </a:p>
+          <a:p>
+            <a:r>
+              <a:rPr sz="1800" b="1">
+                <a:solidFill>
+                  <a:srgbClr val="03306E"/>
+                </a:solidFill>
+                <a:latin typeface="Calibri"/>
+              </a:rPr>
+              <a:t>The Institution of Mechanical Engineers.</a:t>
+            </a:r>
+          </a:p>
+        </p:txBody>
+      </p:sp>
+    </p:spTree>
+  </p:cSld>
+  <p:clrMapOvr>
+    <a:masterClrMapping/>
+  </p:clrMapOvr>
+</p:sld>
+</file>
+
+<file path=ppt/slides/slide13.xml><?xml version="1.0" encoding="utf-8"?>
+<p:sld xmlns:a="http://schemas.openxmlformats.org/drawingml/2006/main" xmlns:p="http://schemas.openxmlformats.org/presentationml/2006/main" xmlns:r="http://schemas.openxmlformats.org/officeDocument/2006/relationships">
+  <p:cSld>
+    <p:bg>
+      <p:bgPr>
+        <a:solidFill>
+          <a:srgbClr val="FFFFFF"/>
+        </a:solidFill>
+        <a:effectLst/>
+      </p:bgPr>
+    </p:bg>
+    <p:spTree>
+      <p:nvGrpSpPr>
+        <p:cNvPr id="1" name=""/>
+        <p:cNvGrpSpPr/>
+        <p:nvPr/>
+      </p:nvGrpSpPr>
+      <p:grpSpPr/>
+      <p:sp>
+        <p:nvSpPr>
+          <p:cNvPr id="2" name="TextBox 1"/>
+          <p:cNvSpPr txBox="1"/>
+          <p:nvPr/>
+        </p:nvSpPr>
+        <p:spPr>
+          <a:xfrm>
+            <a:off x="548640" y="320040"/>
+            <a:ext cx="11094415" cy="274320"/>
+          </a:xfrm>
+          <a:prstGeom prst="rect">
+            <a:avLst/>
+          </a:prstGeom>
+          <a:noFill/>
+        </p:spPr>
+        <p:txBody>
+          <a:bodyPr wrap="square" anchor="t" lIns="0" rIns="0" tIns="0" bIns="0"/>
+          <a:lstStyle/>
+          <a:p>
+            <a:pPr algn="l"/>
+            <a:r>
+              <a:rPr sz="1100" b="1" i="0">
+                <a:solidFill>
+                  <a:srgbClr val="54595D"/>
+                </a:solidFill>
+                <a:latin typeface="Calibri"/>
+              </a:rPr>
+              <a:t>MECHANICAL ENGINEERING  ·  Mechanical: Knowledge criteria</a:t>
+            </a:r>
+          </a:p>
+        </p:txBody>
+      </p:sp>
+      <p:sp>
+        <p:nvSpPr>
+          <p:cNvPr id="3" name="TextBox 2"/>
+          <p:cNvSpPr txBox="1"/>
+          <p:nvPr/>
+        </p:nvSpPr>
+        <p:spPr>
+          <a:xfrm>
+            <a:off x="548640" y="566928"/>
+            <a:ext cx="11094415" cy="822960"/>
+          </a:xfrm>
+          <a:prstGeom prst="rect">
+            <a:avLst/>
+          </a:prstGeom>
+          <a:noFill/>
+        </p:spPr>
+        <p:txBody>
+          <a:bodyPr wrap="square" anchor="ctr" lIns="0" rIns="0" tIns="0" bIns="0"/>
+          <a:lstStyle/>
+          <a:p>
+            <a:pPr algn="l"/>
+            <a:r>
+              <a:rPr sz="3200" b="1" i="0">
+                <a:solidFill>
+                  <a:srgbClr val="03306E"/>
+                </a:solidFill>
+                <a:latin typeface="Cambria"/>
+              </a:rPr>
+              <a:t>Activity: Three audiences</a:t>
+            </a:r>
+          </a:p>
+        </p:txBody>
+      </p:sp>
+      <p:sp>
+        <p:nvSpPr>
+          <p:cNvPr id="4" name="TextBox 3"/>
+          <p:cNvSpPr txBox="1"/>
+          <p:nvPr/>
+        </p:nvSpPr>
+        <p:spPr>
+          <a:xfrm>
+            <a:off x="548640" y="6446520"/>
+            <a:ext cx="8229600" cy="274320"/>
+          </a:xfrm>
+          <a:prstGeom prst="rect">
+            <a:avLst/>
+          </a:prstGeom>
+          <a:noFill/>
+        </p:spPr>
+        <p:txBody>
+          <a:bodyPr wrap="square" anchor="t" lIns="0" rIns="0" tIns="0" bIns="0"/>
+          <a:lstStyle/>
+          <a:p>
+            <a:pPr algn="l"/>
+            <a:r>
+              <a:rPr sz="1000" b="0" i="0">
+                <a:solidFill>
+                  <a:srgbClr val="54595D"/>
+                </a:solidFill>
+                <a:latin typeface="Calibri"/>
+              </a:rPr>
+              <a:t>Design and Development for Engineering and Manufacturing T Level  ·  Mechanical Drawings, Standards and Communication</a:t>
+            </a:r>
+          </a:p>
+        </p:txBody>
+      </p:sp>
+      <p:sp>
+        <p:nvSpPr>
+          <p:cNvPr id="5" name="TextBox 4"/>
+          <p:cNvSpPr txBox="1"/>
+          <p:nvPr/>
+        </p:nvSpPr>
+        <p:spPr>
+          <a:xfrm>
+            <a:off x="10728655" y="6446520"/>
+            <a:ext cx="914400" cy="274320"/>
+          </a:xfrm>
+          <a:prstGeom prst="rect">
+            <a:avLst/>
+          </a:prstGeom>
+          <a:noFill/>
+        </p:spPr>
+        <p:txBody>
+          <a:bodyPr wrap="square" anchor="t" lIns="0" rIns="0" tIns="0" bIns="0"/>
+          <a:lstStyle/>
+          <a:p>
+            <a:pPr algn="r"/>
+            <a:r>
+              <a:rPr sz="1000" b="0" i="0">
+                <a:solidFill>
+                  <a:srgbClr val="54595D"/>
+                </a:solidFill>
+                <a:latin typeface="Calibri"/>
+              </a:rPr>
+              <a:t>13</a:t>
+            </a:r>
+          </a:p>
+        </p:txBody>
+      </p:sp>
+      <p:sp>
+        <p:nvSpPr>
+          <p:cNvPr id="6" name="Rounded Rectangle 5"/>
+          <p:cNvSpPr/>
+          <p:nvPr/>
+        </p:nvSpPr>
+        <p:spPr>
+          <a:xfrm>
+            <a:off x="548640" y="1508760"/>
+            <a:ext cx="2011680" cy="457200"/>
+          </a:xfrm>
+          <a:prstGeom prst="roundRect">
+            <a:avLst>
+              <a:gd name="adj" fmla="val 50000"/>
+            </a:avLst>
+          </a:prstGeom>
+          <a:solidFill>
+            <a:srgbClr val="E0463A"/>
+          </a:solidFill>
+          <a:ln>
+            <a:noFill/>
+          </a:ln>
+          <a:effectLst/>
+        </p:spPr>
+        <p:style>
+          <a:lnRef idx="1">
+            <a:schemeClr val="accent1"/>
+          </a:lnRef>
+          <a:fillRef idx="3">
+            <a:schemeClr val="accent1"/>
+          </a:fillRef>
+          <a:effectRef idx="2">
+            <a:schemeClr val="accent1"/>
+          </a:effectRef>
+          <a:fontRef idx="minor">
+            <a:schemeClr val="lt1"/>
+          </a:fontRef>
+        </p:style>
+        <p:txBody>
+          <a:bodyPr rtlCol="0" anchor="ctr"/>
+          <a:lstStyle/>
+          <a:p/>
+        </p:txBody>
+      </p:sp>
+      <p:sp>
+        <p:nvSpPr>
+          <p:cNvPr id="7" name="TextBox 6"/>
+          <p:cNvSpPr txBox="1"/>
+          <p:nvPr/>
+        </p:nvSpPr>
+        <p:spPr>
+          <a:xfrm>
+            <a:off x="548640" y="1508760"/>
+            <a:ext cx="2011680" cy="457200"/>
+          </a:xfrm>
+          <a:prstGeom prst="rect">
+            <a:avLst/>
+          </a:prstGeom>
+          <a:noFill/>
+        </p:spPr>
+        <p:txBody>
+          <a:bodyPr wrap="square" anchor="ctr" lIns="0" rIns="0" tIns="0" bIns="0"/>
+          <a:lstStyle/>
+          <a:p>
+            <a:pPr algn="ctr"/>
+            <a:r>
+              <a:rPr sz="1400" b="1" i="0">
+                <a:solidFill>
+                  <a:srgbClr val="FFFFFF"/>
+                </a:solidFill>
+                <a:latin typeface="Calibri"/>
+              </a:rPr>
+              <a:t>30 minutes</a:t>
+            </a:r>
+          </a:p>
+        </p:txBody>
+      </p:sp>
+      <p:sp>
+        <p:nvSpPr>
+          <p:cNvPr id="8" name="TextBox 7"/>
+          <p:cNvSpPr txBox="1"/>
+          <p:nvPr/>
+        </p:nvSpPr>
+        <p:spPr>
+          <a:xfrm>
+            <a:off x="2743200" y="1508760"/>
+            <a:ext cx="4754880" cy="457200"/>
+          </a:xfrm>
+          <a:prstGeom prst="rect">
+            <a:avLst/>
+          </a:prstGeom>
+          <a:noFill/>
+        </p:spPr>
+        <p:txBody>
+          <a:bodyPr wrap="square" anchor="ctr" lIns="0" rIns="0" tIns="0" bIns="0"/>
+          <a:lstStyle/>
+          <a:p>
+            <a:pPr algn="l"/>
+            <a:r>
+              <a:rPr sz="1400" b="0" i="1">
+                <a:solidFill>
+                  <a:srgbClr val="54595D"/>
+                </a:solidFill>
+                <a:latin typeface="Calibri"/>
+              </a:rPr>
+              <a:t>Small groups</a:t>
+            </a:r>
+          </a:p>
+        </p:txBody>
+      </p:sp>
+      <p:sp>
+        <p:nvSpPr>
+          <p:cNvPr id="9" name="Oval 8"/>
+          <p:cNvSpPr/>
+          <p:nvPr/>
+        </p:nvSpPr>
+        <p:spPr>
+          <a:xfrm>
+            <a:off x="548640" y="2482596"/>
+            <a:ext cx="384048" cy="384048"/>
+          </a:xfrm>
+          <a:prstGeom prst="ellipse">
+            <a:avLst/>
+          </a:prstGeom>
+          <a:solidFill>
+            <a:srgbClr val="0645AD"/>
+          </a:solidFill>
+          <a:ln>
+            <a:noFill/>
+          </a:ln>
+          <a:effectLst/>
+        </p:spPr>
+        <p:style>
+          <a:lnRef idx="1">
+            <a:schemeClr val="accent1"/>
+          </a:lnRef>
+          <a:fillRef idx="3">
+            <a:schemeClr val="accent1"/>
+          </a:fillRef>
+          <a:effectRef idx="2">
+            <a:schemeClr val="accent1"/>
+          </a:effectRef>
+          <a:fontRef idx="minor">
+            <a:schemeClr val="lt1"/>
+          </a:fontRef>
+        </p:style>
+        <p:txBody>
+          <a:bodyPr rtlCol="0" anchor="ctr" lIns="0" rIns="0" tIns="0" bIns="0"/>
+          <a:lstStyle/>
+          <a:p>
+            <a:pPr algn="ctr"/>
+            <a:r>
+              <a:rPr sz="1300" b="1">
+                <a:solidFill>
+                  <a:srgbClr val="FFFFFF"/>
+                </a:solidFill>
+                <a:latin typeface="Calibri"/>
+              </a:rPr>
+              <a:t>1</a:t>
+            </a:r>
+          </a:p>
+        </p:txBody>
+      </p:sp>
+      <p:sp>
+        <p:nvSpPr>
+          <p:cNvPr id="10" name="TextBox 9"/>
+          <p:cNvSpPr txBox="1"/>
+          <p:nvPr/>
+        </p:nvSpPr>
+        <p:spPr>
+          <a:xfrm>
+            <a:off x="1143000" y="2240280"/>
+            <a:ext cx="5943600" cy="868680"/>
+          </a:xfrm>
+          <a:prstGeom prst="rect">
+            <a:avLst/>
+          </a:prstGeom>
+          <a:noFill/>
+        </p:spPr>
+        <p:txBody>
+          <a:bodyPr wrap="square" anchor="ctr" lIns="0" rIns="0" tIns="0" bIns="0"/>
+          <a:lstStyle/>
+          <a:p>
+            <a:pPr algn="l"/>
+            <a:r>
+              <a:rPr sz="1700" b="0" i="0">
+                <a:solidFill>
+                  <a:srgbClr val="202122"/>
+                </a:solidFill>
+                <a:latin typeface="Calibri"/>
+              </a:rPr>
+              <a:t>Take a simple component such as a shaft with a keyway.</a:t>
+            </a:r>
+          </a:p>
+        </p:txBody>
+      </p:sp>
+      <p:sp>
+        <p:nvSpPr>
+          <p:cNvPr id="11" name="Oval 10"/>
+          <p:cNvSpPr/>
+          <p:nvPr/>
+        </p:nvSpPr>
+        <p:spPr>
+          <a:xfrm>
+            <a:off x="548640" y="3461004"/>
+            <a:ext cx="384048" cy="384048"/>
+          </a:xfrm>
+          <a:prstGeom prst="ellipse">
+            <a:avLst/>
+          </a:prstGeom>
+          <a:solidFill>
+            <a:srgbClr val="0645AD"/>
+          </a:solidFill>
+          <a:ln>
+            <a:noFill/>
+          </a:ln>
+          <a:effectLst/>
+        </p:spPr>
+        <p:style>
+          <a:lnRef idx="1">
+            <a:schemeClr val="accent1"/>
+          </a:lnRef>
+          <a:fillRef idx="3">
+            <a:schemeClr val="accent1"/>
+          </a:fillRef>
+          <a:effectRef idx="2">
+            <a:schemeClr val="accent1"/>
+          </a:effectRef>
+          <a:fontRef idx="minor">
+            <a:schemeClr val="lt1"/>
+          </a:fontRef>
+        </p:style>
+        <p:txBody>
+          <a:bodyPr rtlCol="0" anchor="ctr" lIns="0" rIns="0" tIns="0" bIns="0"/>
+          <a:lstStyle/>
+          <a:p>
+            <a:pPr algn="ctr"/>
+            <a:r>
+              <a:rPr sz="1300" b="1">
+                <a:solidFill>
+                  <a:srgbClr val="FFFFFF"/>
+                </a:solidFill>
+                <a:latin typeface="Calibri"/>
+              </a:rPr>
+              <a:t>2</a:t>
+            </a:r>
+          </a:p>
+        </p:txBody>
+      </p:sp>
+      <p:sp>
+        <p:nvSpPr>
+          <p:cNvPr id="12" name="TextBox 11"/>
+          <p:cNvSpPr txBox="1"/>
+          <p:nvPr/>
+        </p:nvSpPr>
+        <p:spPr>
+          <a:xfrm>
+            <a:off x="1143000" y="3218688"/>
+            <a:ext cx="5943600" cy="868680"/>
+          </a:xfrm>
+          <a:prstGeom prst="rect">
+            <a:avLst/>
+          </a:prstGeom>
+          <a:noFill/>
+        </p:spPr>
+        <p:txBody>
+          <a:bodyPr wrap="square" anchor="ctr" lIns="0" rIns="0" tIns="0" bIns="0"/>
+          <a:lstStyle/>
+          <a:p>
+            <a:pPr algn="l"/>
+            <a:r>
+              <a:rPr sz="1700" b="0" i="0">
+                <a:solidFill>
+                  <a:srgbClr val="202122"/>
+                </a:solidFill>
+                <a:latin typeface="Calibri"/>
+              </a:rPr>
+              <a:t>Produce a detailed drawing for the machinist.</a:t>
+            </a:r>
+          </a:p>
+        </p:txBody>
+      </p:sp>
+      <p:sp>
+        <p:nvSpPr>
+          <p:cNvPr id="13" name="Oval 12"/>
+          <p:cNvSpPr/>
+          <p:nvPr/>
+        </p:nvSpPr>
+        <p:spPr>
+          <a:xfrm>
+            <a:off x="548640" y="4439412"/>
+            <a:ext cx="384048" cy="384048"/>
+          </a:xfrm>
+          <a:prstGeom prst="ellipse">
+            <a:avLst/>
+          </a:prstGeom>
+          <a:solidFill>
+            <a:srgbClr val="0645AD"/>
+          </a:solidFill>
+          <a:ln>
+            <a:noFill/>
+          </a:ln>
+          <a:effectLst/>
+        </p:spPr>
+        <p:style>
+          <a:lnRef idx="1">
+            <a:schemeClr val="accent1"/>
+          </a:lnRef>
+          <a:fillRef idx="3">
+            <a:schemeClr val="accent1"/>
+          </a:fillRef>
+          <a:effectRef idx="2">
+            <a:schemeClr val="accent1"/>
+          </a:effectRef>
+          <a:fontRef idx="minor">
+            <a:schemeClr val="lt1"/>
+          </a:fontRef>
+        </p:style>
+        <p:txBody>
+          <a:bodyPr rtlCol="0" anchor="ctr" lIns="0" rIns="0" tIns="0" bIns="0"/>
+          <a:lstStyle/>
+          <a:p>
+            <a:pPr algn="ctr"/>
+            <a:r>
+              <a:rPr sz="1300" b="1">
+                <a:solidFill>
+                  <a:srgbClr val="FFFFFF"/>
+                </a:solidFill>
+                <a:latin typeface="Calibri"/>
+              </a:rPr>
+              <a:t>3</a:t>
+            </a:r>
+          </a:p>
+        </p:txBody>
+      </p:sp>
+      <p:sp>
+        <p:nvSpPr>
+          <p:cNvPr id="14" name="TextBox 13"/>
+          <p:cNvSpPr txBox="1"/>
+          <p:nvPr/>
+        </p:nvSpPr>
+        <p:spPr>
+          <a:xfrm>
+            <a:off x="1143000" y="4197096"/>
+            <a:ext cx="5943600" cy="868680"/>
+          </a:xfrm>
+          <a:prstGeom prst="rect">
+            <a:avLst/>
+          </a:prstGeom>
+          <a:noFill/>
+        </p:spPr>
+        <p:txBody>
+          <a:bodyPr wrap="square" anchor="ctr" lIns="0" rIns="0" tIns="0" bIns="0"/>
+          <a:lstStyle/>
+          <a:p>
+            <a:pPr algn="l"/>
+            <a:r>
+              <a:rPr sz="1700" b="0" i="0">
+                <a:solidFill>
+                  <a:srgbClr val="202122"/>
+                </a:solidFill>
+                <a:latin typeface="Calibri"/>
+              </a:rPr>
+              <a:t>Produce a visual for the customer.</a:t>
+            </a:r>
+          </a:p>
+        </p:txBody>
+      </p:sp>
+      <p:sp>
+        <p:nvSpPr>
+          <p:cNvPr id="15" name="Oval 14"/>
+          <p:cNvSpPr/>
+          <p:nvPr/>
+        </p:nvSpPr>
+        <p:spPr>
+          <a:xfrm>
+            <a:off x="548640" y="5417820"/>
+            <a:ext cx="384048" cy="384048"/>
+          </a:xfrm>
+          <a:prstGeom prst="ellipse">
+            <a:avLst/>
+          </a:prstGeom>
+          <a:solidFill>
+            <a:srgbClr val="0645AD"/>
+          </a:solidFill>
+          <a:ln>
+            <a:noFill/>
+          </a:ln>
+          <a:effectLst/>
+        </p:spPr>
+        <p:style>
+          <a:lnRef idx="1">
+            <a:schemeClr val="accent1"/>
+          </a:lnRef>
+          <a:fillRef idx="3">
+            <a:schemeClr val="accent1"/>
+          </a:fillRef>
+          <a:effectRef idx="2">
+            <a:schemeClr val="accent1"/>
+          </a:effectRef>
+          <a:fontRef idx="minor">
+            <a:schemeClr val="lt1"/>
+          </a:fontRef>
+        </p:style>
+        <p:txBody>
+          <a:bodyPr rtlCol="0" anchor="ctr" lIns="0" rIns="0" tIns="0" bIns="0"/>
+          <a:lstStyle/>
+          <a:p>
+            <a:pPr algn="ctr"/>
+            <a:r>
+              <a:rPr sz="1300" b="1">
+                <a:solidFill>
+                  <a:srgbClr val="FFFFFF"/>
+                </a:solidFill>
+                <a:latin typeface="Calibri"/>
+              </a:rPr>
+              <a:t>4</a:t>
+            </a:r>
+          </a:p>
+        </p:txBody>
+      </p:sp>
+      <p:sp>
+        <p:nvSpPr>
+          <p:cNvPr id="16" name="TextBox 15"/>
+          <p:cNvSpPr txBox="1"/>
+          <p:nvPr/>
+        </p:nvSpPr>
+        <p:spPr>
+          <a:xfrm>
+            <a:off x="1143000" y="5175504"/>
+            <a:ext cx="5943600" cy="868680"/>
+          </a:xfrm>
+          <a:prstGeom prst="rect">
+            <a:avLst/>
+          </a:prstGeom>
+          <a:noFill/>
+        </p:spPr>
+        <p:txBody>
+          <a:bodyPr wrap="square" anchor="ctr" lIns="0" rIns="0" tIns="0" bIns="0"/>
+          <a:lstStyle/>
+          <a:p>
+            <a:pPr algn="l"/>
+            <a:r>
+              <a:rPr sz="1700" b="0" i="0">
+                <a:solidFill>
+                  <a:srgbClr val="202122"/>
+                </a:solidFill>
+                <a:latin typeface="Calibri"/>
+              </a:rPr>
+              <a:t>Write a one-paragraph summary for a manager.</a:t>
+            </a:r>
+          </a:p>
+        </p:txBody>
+      </p:sp>
+      <p:sp>
+        <p:nvSpPr>
+          <p:cNvPr id="17" name="Rounded Rectangle 16"/>
+          <p:cNvSpPr/>
+          <p:nvPr/>
+        </p:nvSpPr>
+        <p:spPr>
+          <a:xfrm>
+            <a:off x="7772400" y="1508760"/>
+            <a:ext cx="3867912" cy="4572000"/>
+          </a:xfrm>
+          <a:prstGeom prst="roundRect">
+            <a:avLst>
+              <a:gd name="adj" fmla="val 8000"/>
+            </a:avLst>
+          </a:prstGeom>
+          <a:solidFill>
+            <a:srgbClr val="EAF3FF"/>
+          </a:solidFill>
+          <a:ln>
+            <a:noFill/>
+          </a:ln>
+          <a:effectLst/>
+        </p:spPr>
+        <p:style>
+          <a:lnRef idx="1">
+            <a:schemeClr val="accent1"/>
+          </a:lnRef>
+          <a:fillRef idx="3">
+            <a:schemeClr val="accent1"/>
+          </a:fillRef>
+          <a:effectRef idx="2">
+            <a:schemeClr val="accent1"/>
+          </a:effectRef>
+          <a:fontRef idx="minor">
+            <a:schemeClr val="lt1"/>
+          </a:fontRef>
+        </p:style>
+        <p:txBody>
+          <a:bodyPr rtlCol="0" anchor="ctr"/>
+          <a:lstStyle/>
+          <a:p/>
+        </p:txBody>
+      </p:sp>
+      <p:sp>
+        <p:nvSpPr>
+          <p:cNvPr id="18" name="TextBox 17"/>
+          <p:cNvSpPr txBox="1"/>
+          <p:nvPr/>
+        </p:nvSpPr>
+        <p:spPr>
+          <a:xfrm>
+            <a:off x="8046720" y="1737360"/>
+            <a:ext cx="3291840" cy="365760"/>
+          </a:xfrm>
+          <a:prstGeom prst="rect">
+            <a:avLst/>
+          </a:prstGeom>
+          <a:noFill/>
+        </p:spPr>
+        <p:txBody>
+          <a:bodyPr wrap="square" anchor="t" lIns="0" rIns="0" tIns="0" bIns="0"/>
+          <a:lstStyle/>
+          <a:p>
+            <a:pPr algn="l"/>
+            <a:r>
+              <a:rPr sz="1300" b="1" i="0">
+                <a:solidFill>
+                  <a:srgbClr val="0645AD"/>
+                </a:solidFill>
+                <a:latin typeface="Calibri"/>
+              </a:rPr>
+              <a:t>SUCCESS CRITERIA</a:t>
+            </a:r>
+          </a:p>
+        </p:txBody>
+      </p:sp>
+      <p:sp>
+        <p:nvSpPr>
+          <p:cNvPr id="19" name="TextBox 18"/>
+          <p:cNvSpPr txBox="1"/>
+          <p:nvPr/>
+        </p:nvSpPr>
+        <p:spPr>
+          <a:xfrm>
+            <a:off x="8046720" y="2240280"/>
+            <a:ext cx="3337560" cy="3657600"/>
+          </a:xfrm>
+          <a:prstGeom prst="rect">
+            <a:avLst/>
+          </a:prstGeom>
+          <a:noFill/>
+        </p:spPr>
+        <p:txBody>
+          <a:bodyPr wrap="square" lIns="0" rIns="0" tIns="0" bIns="0">
+            <a:spAutoFit/>
+          </a:bodyPr>
+          <a:lstStyle/>
+          <a:p>
+            <a:pPr marL="274320" indent="-274320">
+              <a:spcAft>
+                <a:spcPts val="810"/>
+              </a:spcAft>
+              <a:buClr>
+                <a:srgbClr val="0645AD"/>
+              </a:buClr>
+              <a:buFont typeface="Arial"/>
+              <a:buChar char="•"/>
+            </a:pPr>
+            <a:r>
+              <a:rPr sz="1800" b="0">
+                <a:solidFill>
+                  <a:srgbClr val="202122"/>
+                </a:solidFill>
+                <a:latin typeface="Calibri"/>
+              </a:rPr>
+              <a:t>Drawing follows BS EN 8888</a:t>
+            </a:r>
+          </a:p>
+          <a:p>
+            <a:pPr marL="274320" indent="-274320">
+              <a:spcAft>
+                <a:spcPts val="810"/>
+              </a:spcAft>
+              <a:buClr>
+                <a:srgbClr val="0645AD"/>
+              </a:buClr>
+              <a:buFont typeface="Arial"/>
+              <a:buChar char="•"/>
+            </a:pPr>
+            <a:r>
+              <a:rPr sz="1800" b="0">
+                <a:solidFill>
+                  <a:srgbClr val="202122"/>
+                </a:solidFill>
+                <a:latin typeface="Calibri"/>
+              </a:rPr>
+              <a:t>Customer visual has no jargon</a:t>
+            </a:r>
+          </a:p>
+          <a:p>
+            <a:pPr marL="274320" indent="-274320">
+              <a:spcAft>
+                <a:spcPts val="810"/>
+              </a:spcAft>
+              <a:buClr>
+                <a:srgbClr val="0645AD"/>
+              </a:buClr>
+              <a:buFont typeface="Arial"/>
+              <a:buChar char="•"/>
+            </a:pPr>
+            <a:r>
+              <a:rPr sz="1800" b="0">
+                <a:solidFill>
+                  <a:srgbClr val="202122"/>
+                </a:solidFill>
+                <a:latin typeface="Calibri"/>
+              </a:rPr>
+              <a:t>Summary is concise</a:t>
+            </a:r>
+          </a:p>
+        </p:txBody>
+      </p:sp>
+    </p:spTree>
+  </p:cSld>
+  <p:clrMapOvr>
+    <a:masterClrMapping/>
+  </p:clrMapOvr>
+</p:sld>
+</file>
+
+<file path=ppt/slides/slide14.xml><?xml version="1.0" encoding="utf-8"?>
+<p:sld xmlns:a="http://schemas.openxmlformats.org/drawingml/2006/main" xmlns:p="http://schemas.openxmlformats.org/presentationml/2006/main" xmlns:r="http://schemas.openxmlformats.org/officeDocument/2006/relationships">
+  <p:cSld>
+    <p:bg>
+      <p:bgPr>
+        <a:solidFill>
           <a:srgbClr val="03306E"/>
         </a:solidFill>
         <a:effectLst/>
@@ -5369,22 +8176,93 @@
       </p:sp>
       <p:sp>
         <p:nvSpPr>
-          <p:cNvPr id="6" name="Rounded Rectangle 5"/>
+          <p:cNvPr id="6" name="TextBox 5"/>
+          <p:cNvSpPr txBox="1"/>
+          <p:nvPr/>
+        </p:nvSpPr>
+        <p:spPr>
+          <a:xfrm>
+            <a:off x="548640" y="1554480"/>
+            <a:ext cx="6720840" cy="4617720"/>
+          </a:xfrm>
+          <a:prstGeom prst="rect">
+            <a:avLst/>
+          </a:prstGeom>
+          <a:noFill/>
+        </p:spPr>
+        <p:txBody>
+          <a:bodyPr wrap="square" lIns="0" rIns="0" tIns="0" bIns="0">
+            <a:spAutoFit/>
+          </a:bodyPr>
+          <a:lstStyle/>
+          <a:p>
+            <a:pPr>
+              <a:spcAft>
+                <a:spcPts val="1320"/>
+              </a:spcAft>
+            </a:pPr>
+            <a:r>
+              <a:rPr sz="2200" b="0">
+                <a:solidFill>
+                  <a:srgbClr val="202122"/>
+                </a:solidFill>
+                <a:latin typeface="Calibri"/>
+              </a:rPr>
+              <a:t>Orthographic drawings show accurate views on standard sheet sizes. Section views show the inside of a part as if cut through, with the cut surfaces hatched.</a:t>
+            </a:r>
+          </a:p>
+          <a:p>
+            <a:pPr>
+              <a:spcAft>
+                <a:spcPts val="1320"/>
+              </a:spcAft>
+            </a:pPr>
+            <a:r>
+              <a:rPr sz="2200" b="0">
+                <a:solidFill>
+                  <a:srgbClr val="202122"/>
+                </a:solidFill>
+                <a:latin typeface="Calibri"/>
+              </a:rPr>
+              <a:t>Standard features such as springs, splines, gears, webs, solid shafts, keys and keyways are drawn using simplified conventions, so they don't need drawing in full detail.</a:t>
+            </a:r>
+          </a:p>
+          <a:p>
+            <a:pPr>
+              <a:spcAft>
+                <a:spcPts val="1320"/>
+              </a:spcAft>
+            </a:pPr>
+            <a:r>
+              <a:rPr sz="2200" b="0">
+                <a:solidFill>
+                  <a:srgbClr val="202122"/>
+                </a:solidFill>
+                <a:latin typeface="Calibri"/>
+              </a:rPr>
+              <a:t>Symbols such as balloons (numbering parts on an assembly), diameter and depth follow BS EN 8888, so any engineer can read the drawing the same way.</a:t>
+            </a:r>
+          </a:p>
+        </p:txBody>
+      </p:sp>
+      <p:sp>
+        <p:nvSpPr>
+          <p:cNvPr id="7" name="Rounded Rectangle 6"/>
           <p:cNvSpPr/>
           <p:nvPr/>
         </p:nvSpPr>
         <p:spPr>
           <a:xfrm>
-            <a:off x="548640" y="1600200"/>
-            <a:ext cx="3515258" cy="4572000"/>
+            <a:off x="7772400" y="1554480"/>
+            <a:ext cx="3867912" cy="4526280"/>
           </a:xfrm>
           <a:prstGeom prst="roundRect">
             <a:avLst>
-              <a:gd name="adj" fmla="val 6000"/>
+              <a:gd name="adj" fmla="val 8000"/>
             </a:avLst>
           </a:prstGeom>
           <a:solidFill>
-            <a:srgbClr val="EAF3FF"/>
+            <a:srgbClr val="03306E"/>
           </a:solidFill>
           <a:ln>
             <a:noFill/>
@@ -5413,14 +8291,14 @@
       </p:sp>
       <p:sp>
         <p:nvSpPr>
-          <p:cNvPr id="7" name="Oval 6"/>
+          <p:cNvPr id="8" name="Oval 7"/>
           <p:cNvSpPr/>
           <p:nvPr/>
         </p:nvSpPr>
         <p:spPr>
           <a:xfrm>
-            <a:off x="777240" y="1828800"/>
-            <a:ext cx="457200" cy="457200"/>
+            <a:off x="8046720" y="1828800"/>
+            <a:ext cx="548640" cy="548640"/>
           </a:xfrm>
           <a:prstGeom prst="ellipse">
             <a:avLst/>
@@ -5453,46 +8331,13 @@
           <a:p>
             <a:pPr algn="ctr"/>
             <a:r>
-              <a:rPr sz="1500" b="1">
+              <a:rPr sz="1300" b="1">
                 <a:solidFill>
                   <a:srgbClr val="FFFFFF"/>
                 </a:solidFill>
                 <a:latin typeface="Calibri"/>
               </a:rPr>
-              <a:t>1</a:t>
-            </a:r>
-          </a:p>
-        </p:txBody>
-      </p:sp>
-      <p:sp>
-        <p:nvSpPr>
-          <p:cNvPr id="8" name="TextBox 7"/>
-          <p:cNvSpPr txBox="1"/>
-          <p:nvPr/>
-        </p:nvSpPr>
-        <p:spPr>
-          <a:xfrm>
-            <a:off x="1371600" y="1801368"/>
-            <a:ext cx="2509418" cy="512064"/>
-          </a:xfrm>
-          <a:prstGeom prst="rect">
-            <a:avLst/>
-          </a:prstGeom>
-          <a:noFill/>
-        </p:spPr>
-        <p:txBody>
-          <a:bodyPr wrap="square" anchor="ctr" lIns="0" rIns="0" tIns="0" bIns="0"/>
-          <a:lstStyle/>
-          <a:p>
-            <a:pPr algn="l"/>
-            <a:r>
-              <a:rPr sz="1700" b="1" i="0">
-                <a:solidFill>
-                  <a:srgbClr val="03306E"/>
-                </a:solidFill>
-                <a:latin typeface="Calibri"/>
-              </a:rPr>
-              <a:t>Orthographic drawings</a:t>
+              <a:t>e.g.</a:t>
             </a:r>
           </a:p>
         </p:txBody>
@@ -5505,8 +8350,8 @@
         </p:nvSpPr>
         <p:spPr>
           <a:xfrm>
-            <a:off x="777240" y="2468880"/>
-            <a:ext cx="3058058" cy="3566160"/>
+            <a:off x="8046720" y="2560320"/>
+            <a:ext cx="3291840" cy="365760"/>
           </a:xfrm>
           <a:prstGeom prst="rect">
             <a:avLst/>
@@ -5519,339 +8364,46 @@
           <a:p>
             <a:pPr algn="l"/>
             <a:r>
-              <a:rPr sz="2000" b="0" i="0">
-                <a:solidFill>
-                  <a:srgbClr val="202122"/>
-                </a:solidFill>
-                <a:latin typeface="Calibri"/>
-              </a:rPr>
-              <a:t>Sheet sizes, views, section views and hatching.</a:t>
-            </a:r>
-          </a:p>
-        </p:txBody>
-      </p:sp>
-      <p:sp>
-        <p:nvSpPr>
-          <p:cNvPr id="10" name="Rounded Rectangle 9"/>
-          <p:cNvSpPr/>
-          <p:nvPr/>
-        </p:nvSpPr>
-        <p:spPr>
-          <a:xfrm>
-            <a:off x="4338218" y="1600200"/>
-            <a:ext cx="3515258" cy="4572000"/>
-          </a:xfrm>
-          <a:prstGeom prst="roundRect">
-            <a:avLst>
-              <a:gd name="adj" fmla="val 6000"/>
-            </a:avLst>
-          </a:prstGeom>
-          <a:solidFill>
-            <a:srgbClr val="EAF3FF"/>
-          </a:solidFill>
-          <a:ln>
-            <a:noFill/>
-          </a:ln>
-          <a:effectLst/>
-        </p:spPr>
-        <p:style>
-          <a:lnRef idx="1">
-            <a:schemeClr val="accent1"/>
-          </a:lnRef>
-          <a:fillRef idx="3">
-            <a:schemeClr val="accent1"/>
-          </a:fillRef>
-          <a:effectRef idx="2">
-            <a:schemeClr val="accent1"/>
-          </a:effectRef>
-          <a:fontRef idx="minor">
-            <a:schemeClr val="lt1"/>
-          </a:fontRef>
-        </p:style>
-        <p:txBody>
-          <a:bodyPr rtlCol="0" anchor="ctr"/>
-          <a:lstStyle/>
-          <a:p/>
-        </p:txBody>
-      </p:sp>
-      <p:sp>
-        <p:nvSpPr>
-          <p:cNvPr id="11" name="Oval 10"/>
-          <p:cNvSpPr/>
-          <p:nvPr/>
-        </p:nvSpPr>
-        <p:spPr>
-          <a:xfrm>
-            <a:off x="4566818" y="1828800"/>
-            <a:ext cx="457200" cy="457200"/>
-          </a:xfrm>
-          <a:prstGeom prst="ellipse">
-            <a:avLst/>
-          </a:prstGeom>
-          <a:solidFill>
-            <a:srgbClr val="E0463A"/>
-          </a:solidFill>
-          <a:ln>
-            <a:noFill/>
-          </a:ln>
-          <a:effectLst/>
-        </p:spPr>
-        <p:style>
-          <a:lnRef idx="1">
-            <a:schemeClr val="accent1"/>
-          </a:lnRef>
-          <a:fillRef idx="3">
-            <a:schemeClr val="accent1"/>
-          </a:fillRef>
-          <a:effectRef idx="2">
-            <a:schemeClr val="accent1"/>
-          </a:effectRef>
-          <a:fontRef idx="minor">
-            <a:schemeClr val="lt1"/>
-          </a:fontRef>
-        </p:style>
-        <p:txBody>
-          <a:bodyPr rtlCol="0" anchor="ctr" lIns="0" rIns="0" tIns="0" bIns="0"/>
-          <a:lstStyle/>
-          <a:p>
-            <a:pPr algn="ctr"/>
-            <a:r>
-              <a:rPr sz="1500" b="1">
+              <a:rPr sz="1300" b="1" i="0">
+                <a:solidFill>
+                  <a:srgbClr val="A9C8F0"/>
+                </a:solidFill>
+                <a:latin typeface="Calibri"/>
+              </a:rPr>
+              <a:t>EXAMPLE</a:t>
+            </a:r>
+          </a:p>
+        </p:txBody>
+      </p:sp>
+      <p:sp>
+        <p:nvSpPr>
+          <p:cNvPr id="10" name="TextBox 9"/>
+          <p:cNvSpPr txBox="1"/>
+          <p:nvPr/>
+        </p:nvSpPr>
+        <p:spPr>
+          <a:xfrm>
+            <a:off x="8046720" y="2971800"/>
+            <a:ext cx="3291840" cy="2971800"/>
+          </a:xfrm>
+          <a:prstGeom prst="rect">
+            <a:avLst/>
+          </a:prstGeom>
+          <a:noFill/>
+        </p:spPr>
+        <p:txBody>
+          <a:bodyPr wrap="square" anchor="t" lIns="0" rIns="0" tIns="0" bIns="0"/>
+          <a:lstStyle/>
+          <a:p>
+            <a:pPr algn="l"/>
+            <a:r>
+              <a:rPr sz="1900" b="0" i="0">
                 <a:solidFill>
                   <a:srgbClr val="FFFFFF"/>
                 </a:solidFill>
-                <a:latin typeface="Calibri"/>
-              </a:rPr>
-              <a:t>2</a:t>
-            </a:r>
-          </a:p>
-        </p:txBody>
-      </p:sp>
-      <p:sp>
-        <p:nvSpPr>
-          <p:cNvPr id="12" name="TextBox 11"/>
-          <p:cNvSpPr txBox="1"/>
-          <p:nvPr/>
-        </p:nvSpPr>
-        <p:spPr>
-          <a:xfrm>
-            <a:off x="5161178" y="1801368"/>
-            <a:ext cx="2509418" cy="512064"/>
-          </a:xfrm>
-          <a:prstGeom prst="rect">
-            <a:avLst/>
-          </a:prstGeom>
-          <a:noFill/>
-        </p:spPr>
-        <p:txBody>
-          <a:bodyPr wrap="square" anchor="ctr" lIns="0" rIns="0" tIns="0" bIns="0"/>
-          <a:lstStyle/>
-          <a:p>
-            <a:pPr algn="l"/>
-            <a:r>
-              <a:rPr sz="1900" b="1" i="0">
-                <a:solidFill>
-                  <a:srgbClr val="03306E"/>
-                </a:solidFill>
-                <a:latin typeface="Calibri"/>
-              </a:rPr>
-              <a:t>Standard features</a:t>
-            </a:r>
-          </a:p>
-        </p:txBody>
-      </p:sp>
-      <p:sp>
-        <p:nvSpPr>
-          <p:cNvPr id="13" name="TextBox 12"/>
-          <p:cNvSpPr txBox="1"/>
-          <p:nvPr/>
-        </p:nvSpPr>
-        <p:spPr>
-          <a:xfrm>
-            <a:off x="4566818" y="2468880"/>
-            <a:ext cx="3058058" cy="3566160"/>
-          </a:xfrm>
-          <a:prstGeom prst="rect">
-            <a:avLst/>
-          </a:prstGeom>
-          <a:noFill/>
-        </p:spPr>
-        <p:txBody>
-          <a:bodyPr wrap="square" anchor="t" lIns="0" rIns="0" tIns="0" bIns="0"/>
-          <a:lstStyle/>
-          <a:p>
-            <a:pPr algn="l"/>
-            <a:r>
-              <a:rPr sz="2000" b="0" i="0">
-                <a:solidFill>
-                  <a:srgbClr val="202122"/>
-                </a:solidFill>
-                <a:latin typeface="Calibri"/>
-              </a:rPr>
-              <a:t>Springs, splines, gears, webs, solid shafts, keys and keyways.</a:t>
-            </a:r>
-          </a:p>
-        </p:txBody>
-      </p:sp>
-      <p:sp>
-        <p:nvSpPr>
-          <p:cNvPr id="14" name="Rounded Rectangle 13"/>
-          <p:cNvSpPr/>
-          <p:nvPr/>
-        </p:nvSpPr>
-        <p:spPr>
-          <a:xfrm>
-            <a:off x="8127796" y="1600200"/>
-            <a:ext cx="3515258" cy="4572000"/>
-          </a:xfrm>
-          <a:prstGeom prst="roundRect">
-            <a:avLst>
-              <a:gd name="adj" fmla="val 6000"/>
-            </a:avLst>
-          </a:prstGeom>
-          <a:solidFill>
-            <a:srgbClr val="EAF3FF"/>
-          </a:solidFill>
-          <a:ln>
-            <a:noFill/>
-          </a:ln>
-          <a:effectLst/>
-        </p:spPr>
-        <p:style>
-          <a:lnRef idx="1">
-            <a:schemeClr val="accent1"/>
-          </a:lnRef>
-          <a:fillRef idx="3">
-            <a:schemeClr val="accent1"/>
-          </a:fillRef>
-          <a:effectRef idx="2">
-            <a:schemeClr val="accent1"/>
-          </a:effectRef>
-          <a:fontRef idx="minor">
-            <a:schemeClr val="lt1"/>
-          </a:fontRef>
-        </p:style>
-        <p:txBody>
-          <a:bodyPr rtlCol="0" anchor="ctr"/>
-          <a:lstStyle/>
-          <a:p/>
-        </p:txBody>
-      </p:sp>
-      <p:sp>
-        <p:nvSpPr>
-          <p:cNvPr id="15" name="Oval 14"/>
-          <p:cNvSpPr/>
-          <p:nvPr/>
-        </p:nvSpPr>
-        <p:spPr>
-          <a:xfrm>
-            <a:off x="8356396" y="1828800"/>
-            <a:ext cx="457200" cy="457200"/>
-          </a:xfrm>
-          <a:prstGeom prst="ellipse">
-            <a:avLst/>
-          </a:prstGeom>
-          <a:solidFill>
-            <a:srgbClr val="E0463A"/>
-          </a:solidFill>
-          <a:ln>
-            <a:noFill/>
-          </a:ln>
-          <a:effectLst/>
-        </p:spPr>
-        <p:style>
-          <a:lnRef idx="1">
-            <a:schemeClr val="accent1"/>
-          </a:lnRef>
-          <a:fillRef idx="3">
-            <a:schemeClr val="accent1"/>
-          </a:fillRef>
-          <a:effectRef idx="2">
-            <a:schemeClr val="accent1"/>
-          </a:effectRef>
-          <a:fontRef idx="minor">
-            <a:schemeClr val="lt1"/>
-          </a:fontRef>
-        </p:style>
-        <p:txBody>
-          <a:bodyPr rtlCol="0" anchor="ctr" lIns="0" rIns="0" tIns="0" bIns="0"/>
-          <a:lstStyle/>
-          <a:p>
-            <a:pPr algn="ctr"/>
-            <a:r>
-              <a:rPr sz="1500" b="1">
-                <a:solidFill>
-                  <a:srgbClr val="FFFFFF"/>
-                </a:solidFill>
-                <a:latin typeface="Calibri"/>
-              </a:rPr>
-              <a:t>3</a:t>
-            </a:r>
-          </a:p>
-        </p:txBody>
-      </p:sp>
-      <p:sp>
-        <p:nvSpPr>
-          <p:cNvPr id="16" name="TextBox 15"/>
-          <p:cNvSpPr txBox="1"/>
-          <p:nvPr/>
-        </p:nvSpPr>
-        <p:spPr>
-          <a:xfrm>
-            <a:off x="8950756" y="1801368"/>
-            <a:ext cx="2509418" cy="512064"/>
-          </a:xfrm>
-          <a:prstGeom prst="rect">
-            <a:avLst/>
-          </a:prstGeom>
-          <a:noFill/>
-        </p:spPr>
-        <p:txBody>
-          <a:bodyPr wrap="square" anchor="ctr" lIns="0" rIns="0" tIns="0" bIns="0"/>
-          <a:lstStyle/>
-          <a:p>
-            <a:pPr algn="l"/>
-            <a:r>
-              <a:rPr sz="1900" b="1" i="0">
-                <a:solidFill>
-                  <a:srgbClr val="03306E"/>
-                </a:solidFill>
-                <a:latin typeface="Calibri"/>
-              </a:rPr>
-              <a:t>Symbols</a:t>
-            </a:r>
-          </a:p>
-        </p:txBody>
-      </p:sp>
-      <p:sp>
-        <p:nvSpPr>
-          <p:cNvPr id="17" name="TextBox 16"/>
-          <p:cNvSpPr txBox="1"/>
-          <p:nvPr/>
-        </p:nvSpPr>
-        <p:spPr>
-          <a:xfrm>
-            <a:off x="8356396" y="2468880"/>
-            <a:ext cx="3058058" cy="3566160"/>
-          </a:xfrm>
-          <a:prstGeom prst="rect">
-            <a:avLst/>
-          </a:prstGeom>
-          <a:noFill/>
-        </p:spPr>
-        <p:txBody>
-          <a:bodyPr wrap="square" anchor="t" lIns="0" rIns="0" tIns="0" bIns="0"/>
-          <a:lstStyle/>
-          <a:p>
-            <a:pPr algn="l"/>
-            <a:r>
-              <a:rPr sz="2000" b="0" i="0">
-                <a:solidFill>
-                  <a:srgbClr val="202122"/>
-                </a:solidFill>
-                <a:latin typeface="Calibri"/>
-              </a:rPr>
-              <a:t>Balloons, diameter, depth, per BS EN 8888.</a:t>
+                <a:latin typeface="Cambria"/>
+              </a:rPr>
+              <a:t>A gearbox assembly drawing uses balloons to number each part, matching a parts list, and a section view shows the bearings inside.</a:t>
             </a:r>
           </a:p>
         </p:txBody>
@@ -5943,7 +8495,7 @@
                 </a:solidFill>
                 <a:latin typeface="Cambria"/>
               </a:rPr>
-              <a:t>Standards bodies</a:t>
+              <a:t>Mechanical drawings</a:t>
             </a:r>
           </a:p>
         </p:txBody>
@@ -6133,13 +8685,13 @@
           <a:p>
             <a:pPr algn="l"/>
             <a:r>
-              <a:rPr sz="1900" b="1" i="0">
+              <a:rPr sz="1700" b="1" i="0">
                 <a:solidFill>
                   <a:srgbClr val="03306E"/>
                 </a:solidFill>
                 <a:latin typeface="Calibri"/>
               </a:rPr>
-              <a:t>BSI</a:t>
+              <a:t>Orthographic drawings</a:t>
             </a:r>
           </a:p>
         </p:txBody>
@@ -6172,7 +8724,7 @@
                 </a:solidFill>
                 <a:latin typeface="Calibri"/>
               </a:rPr>
-              <a:t>British Standards Institution: UK standards.</a:t>
+              <a:t>Sheet sizes, views, section views and hatching.</a:t>
             </a:r>
           </a:p>
         </p:txBody>
@@ -6302,7 +8854,7 @@
                 </a:solidFill>
                 <a:latin typeface="Calibri"/>
               </a:rPr>
-              <a:t>ISO</a:t>
+              <a:t>Standard features</a:t>
             </a:r>
           </a:p>
         </p:txBody>
@@ -6335,7 +8887,7 @@
                 </a:solidFill>
                 <a:latin typeface="Calibri"/>
               </a:rPr>
-              <a:t>International Organization for Standardization.</a:t>
+              <a:t>Springs, splines, gears, webs, solid shafts, keys and keyways.</a:t>
             </a:r>
           </a:p>
         </p:txBody>
@@ -6465,7 +9017,7 @@
                 </a:solidFill>
                 <a:latin typeface="Calibri"/>
               </a:rPr>
-              <a:t>IMechE</a:t>
+              <a:t>Symbols</a:t>
             </a:r>
           </a:p>
         </p:txBody>
@@ -6498,7 +9050,7 @@
                 </a:solidFill>
                 <a:latin typeface="Calibri"/>
               </a:rPr>
-              <a:t>Institution of Mechanical Engineers: professional codes and guidance.</a:t>
+              <a:t>Balloons, diameter, depth, per BS EN 8888.</a:t>
             </a:r>
           </a:p>
         </p:txBody>
@@ -6590,7 +9142,7 @@
                 </a:solidFill>
                 <a:latin typeface="Cambria"/>
               </a:rPr>
-              <a:t>Communicating engineering information</a:t>
+              <a:t>Quick check: Mechanical drawings</a:t>
             </a:r>
           </a:p>
         </p:txBody>
@@ -6663,22 +9215,20 @@
       </p:sp>
       <p:sp>
         <p:nvSpPr>
-          <p:cNvPr id="6" name="Rounded Rectangle 5"/>
+          <p:cNvPr id="6" name="Oval 5"/>
           <p:cNvSpPr/>
           <p:nvPr/>
         </p:nvSpPr>
         <p:spPr>
           <a:xfrm>
-            <a:off x="548640" y="1600200"/>
-            <a:ext cx="5364327" cy="640080"/>
-          </a:xfrm>
-          <a:prstGeom prst="roundRect">
-            <a:avLst>
-              <a:gd name="adj" fmla="val 15000"/>
-            </a:avLst>
+            <a:off x="548640" y="1691640"/>
+            <a:ext cx="502920" cy="502920"/>
+          </a:xfrm>
+          <a:prstGeom prst="ellipse">
+            <a:avLst/>
           </a:prstGeom>
           <a:solidFill>
-            <a:srgbClr val="03306E"/>
+            <a:srgbClr val="E0463A"/>
           </a:solidFill>
           <a:ln>
             <a:noFill/>
@@ -6700,9 +9250,20 @@
           </a:fontRef>
         </p:style>
         <p:txBody>
-          <a:bodyPr rtlCol="0" anchor="ctr"/>
-          <a:lstStyle/>
-          <a:p/>
+          <a:bodyPr rtlCol="0" anchor="ctr" lIns="0" rIns="0" tIns="0" bIns="0"/>
+          <a:lstStyle/>
+          <a:p>
+            <a:pPr algn="ctr"/>
+            <a:r>
+              <a:rPr sz="1600" b="1">
+                <a:solidFill>
+                  <a:srgbClr val="FFFFFF"/>
+                </a:solidFill>
+                <a:latin typeface="Calibri"/>
+              </a:rPr>
+              <a:t>1</a:t>
+            </a:r>
+          </a:p>
         </p:txBody>
       </p:sp>
       <p:sp>
@@ -6713,49 +9274,47 @@
         </p:nvSpPr>
         <p:spPr>
           <a:xfrm>
-            <a:off x="777240" y="1600200"/>
-            <a:ext cx="4907127" cy="640080"/>
-          </a:xfrm>
-          <a:prstGeom prst="rect">
-            <a:avLst/>
-          </a:prstGeom>
-          <a:noFill/>
-        </p:spPr>
-        <p:txBody>
-          <a:bodyPr wrap="square" anchor="ctr" lIns="0" rIns="0" tIns="0" bIns="0"/>
+            <a:off x="1371600" y="1645920"/>
+            <a:ext cx="10271455" cy="1188720"/>
+          </a:xfrm>
+          <a:prstGeom prst="rect">
+            <a:avLst/>
+          </a:prstGeom>
+          <a:noFill/>
+        </p:spPr>
+        <p:txBody>
+          <a:bodyPr wrap="square" anchor="t" lIns="0" rIns="0" tIns="0" bIns="0"/>
           <a:lstStyle/>
           <a:p>
             <a:pPr algn="l"/>
             <a:r>
-              <a:rPr sz="2000" b="1" i="0">
-                <a:solidFill>
-                  <a:srgbClr val="FFFFFF"/>
-                </a:solidFill>
-                <a:latin typeface="Calibri"/>
-              </a:rPr>
-              <a:t>Methods</a:t>
-            </a:r>
-          </a:p>
-        </p:txBody>
-      </p:sp>
-      <p:sp>
-        <p:nvSpPr>
-          <p:cNvPr id="8" name="Rounded Rectangle 7"/>
+              <a:rPr sz="2400" b="0" i="0">
+                <a:solidFill>
+                  <a:srgbClr val="202122"/>
+                </a:solidFill>
+                <a:latin typeface="Calibri"/>
+              </a:rPr>
+              <a:t>What does a section view show?</a:t>
+            </a:r>
+          </a:p>
+        </p:txBody>
+      </p:sp>
+      <p:sp>
+        <p:nvSpPr>
+          <p:cNvPr id="8" name="Oval 7"/>
           <p:cNvSpPr/>
           <p:nvPr/>
         </p:nvSpPr>
         <p:spPr>
           <a:xfrm>
-            <a:off x="548640" y="2377440"/>
-            <a:ext cx="5364327" cy="3794760"/>
-          </a:xfrm>
-          <a:prstGeom prst="roundRect">
-            <a:avLst>
-              <a:gd name="adj" fmla="val 4000"/>
-            </a:avLst>
+            <a:off x="548640" y="3108960"/>
+            <a:ext cx="502920" cy="502920"/>
+          </a:xfrm>
+          <a:prstGeom prst="ellipse">
+            <a:avLst/>
           </a:prstGeom>
           <a:solidFill>
-            <a:srgbClr val="EAF3FF"/>
+            <a:srgbClr val="E0463A"/>
           </a:solidFill>
           <a:ln>
             <a:noFill/>
@@ -6777,9 +9336,20 @@
           </a:fontRef>
         </p:style>
         <p:txBody>
-          <a:bodyPr rtlCol="0" anchor="ctr"/>
-          <a:lstStyle/>
-          <a:p/>
+          <a:bodyPr rtlCol="0" anchor="ctr" lIns="0" rIns="0" tIns="0" bIns="0"/>
+          <a:lstStyle/>
+          <a:p>
+            <a:pPr algn="ctr"/>
+            <a:r>
+              <a:rPr sz="1600" b="1">
+                <a:solidFill>
+                  <a:srgbClr val="FFFFFF"/>
+                </a:solidFill>
+                <a:latin typeface="Calibri"/>
+              </a:rPr>
+              <a:t>2</a:t>
+            </a:r>
+          </a:p>
         </p:txBody>
       </p:sp>
       <p:sp>
@@ -6790,144 +9360,47 @@
         </p:nvSpPr>
         <p:spPr>
           <a:xfrm>
-            <a:off x="822959" y="2606040"/>
-            <a:ext cx="4815687" cy="3337560"/>
-          </a:xfrm>
-          <a:prstGeom prst="rect">
-            <a:avLst/>
-          </a:prstGeom>
-          <a:noFill/>
-        </p:spPr>
-        <p:txBody>
-          <a:bodyPr wrap="square" lIns="0" rIns="0" tIns="0" bIns="0">
-            <a:spAutoFit/>
-          </a:bodyPr>
-          <a:lstStyle/>
-          <a:p>
-            <a:pPr marL="274320" indent="-274320">
-              <a:spcAft>
-                <a:spcPts val="945"/>
-              </a:spcAft>
-              <a:buClr>
-                <a:srgbClr val="0645AD"/>
-              </a:buClr>
-              <a:buFont typeface="Arial"/>
-              <a:buChar char="•"/>
-            </a:pPr>
-            <a:r>
-              <a:rPr sz="2100" b="0">
+            <a:off x="1371600" y="3063240"/>
+            <a:ext cx="10271455" cy="1188720"/>
+          </a:xfrm>
+          <a:prstGeom prst="rect">
+            <a:avLst/>
+          </a:prstGeom>
+          <a:noFill/>
+        </p:spPr>
+        <p:txBody>
+          <a:bodyPr wrap="square" anchor="t" lIns="0" rIns="0" tIns="0" bIns="0"/>
+          <a:lstStyle/>
+          <a:p>
+            <a:pPr algn="l"/>
+            <a:r>
+              <a:rPr sz="2400" b="0" i="0">
                 <a:solidFill>
                   <a:srgbClr val="202122"/>
                 </a:solidFill>
                 <a:latin typeface="Calibri"/>
               </a:rPr>
-              <a:t>CAD models and engineering drawings</a:t>
-            </a:r>
-          </a:p>
-          <a:p>
-            <a:pPr marL="274320" indent="-274320">
-              <a:spcAft>
-                <a:spcPts val="945"/>
-              </a:spcAft>
-              <a:buClr>
-                <a:srgbClr val="0645AD"/>
-              </a:buClr>
-              <a:buFont typeface="Arial"/>
-              <a:buChar char="•"/>
-            </a:pPr>
-            <a:r>
-              <a:rPr sz="2100" b="0">
-                <a:solidFill>
-                  <a:srgbClr val="202122"/>
-                </a:solidFill>
-                <a:latin typeface="Calibri"/>
-              </a:rPr>
-              <a:t>Specifications, SOPs and reports</a:t>
-            </a:r>
-          </a:p>
-          <a:p>
-            <a:pPr marL="274320" indent="-274320">
-              <a:spcAft>
-                <a:spcPts val="945"/>
-              </a:spcAft>
-              <a:buClr>
-                <a:srgbClr val="0645AD"/>
-              </a:buClr>
-              <a:buFont typeface="Arial"/>
-              <a:buChar char="•"/>
-            </a:pPr>
-            <a:r>
-              <a:rPr sz="2100" b="0">
-                <a:solidFill>
-                  <a:srgbClr val="202122"/>
-                </a:solidFill>
-                <a:latin typeface="Calibri"/>
-              </a:rPr>
-              <a:t>Presentations</a:t>
-            </a:r>
-          </a:p>
-          <a:p>
-            <a:pPr marL="274320" indent="-274320">
-              <a:spcAft>
-                <a:spcPts val="945"/>
-              </a:spcAft>
-              <a:buClr>
-                <a:srgbClr val="0645AD"/>
-              </a:buClr>
-              <a:buFont typeface="Arial"/>
-              <a:buChar char="•"/>
-            </a:pPr>
-            <a:r>
-              <a:rPr sz="2100" b="0">
-                <a:solidFill>
-                  <a:srgbClr val="202122"/>
-                </a:solidFill>
-                <a:latin typeface="Calibri"/>
-              </a:rPr>
-              <a:t>Graphs of performance data and SPC</a:t>
-            </a:r>
-          </a:p>
-          <a:p>
-            <a:pPr marL="274320" indent="-274320">
-              <a:spcAft>
-                <a:spcPts val="945"/>
-              </a:spcAft>
-              <a:buClr>
-                <a:srgbClr val="0645AD"/>
-              </a:buClr>
-              <a:buFont typeface="Arial"/>
-              <a:buChar char="•"/>
-            </a:pPr>
-            <a:r>
-              <a:rPr sz="2100" b="0">
-                <a:solidFill>
-                  <a:srgbClr val="202122"/>
-                </a:solidFill>
-                <a:latin typeface="Calibri"/>
-              </a:rPr>
-              <a:t>Sending programs to CNC machines</a:t>
-            </a:r>
-          </a:p>
-        </p:txBody>
-      </p:sp>
-      <p:sp>
-        <p:nvSpPr>
-          <p:cNvPr id="10" name="Rounded Rectangle 9"/>
+              <a:t>What is a balloon on a drawing?</a:t>
+            </a:r>
+          </a:p>
+        </p:txBody>
+      </p:sp>
+      <p:sp>
+        <p:nvSpPr>
+          <p:cNvPr id="10" name="Oval 9"/>
           <p:cNvSpPr/>
           <p:nvPr/>
         </p:nvSpPr>
         <p:spPr>
           <a:xfrm>
-            <a:off x="6278727" y="1600200"/>
-            <a:ext cx="5364327" cy="640080"/>
-          </a:xfrm>
-          <a:prstGeom prst="roundRect">
-            <a:avLst>
-              <a:gd name="adj" fmla="val 15000"/>
-            </a:avLst>
+            <a:off x="548640" y="4526280"/>
+            <a:ext cx="502920" cy="502920"/>
+          </a:xfrm>
+          <a:prstGeom prst="ellipse">
+            <a:avLst/>
           </a:prstGeom>
           <a:solidFill>
-            <a:srgbClr val="0645AD"/>
+            <a:srgbClr val="E0463A"/>
           </a:solidFill>
           <a:ln>
             <a:noFill/>
@@ -6949,9 +9422,20 @@
           </a:fontRef>
         </p:style>
         <p:txBody>
-          <a:bodyPr rtlCol="0" anchor="ctr"/>
-          <a:lstStyle/>
-          <a:p/>
+          <a:bodyPr rtlCol="0" anchor="ctr" lIns="0" rIns="0" tIns="0" bIns="0"/>
+          <a:lstStyle/>
+          <a:p>
+            <a:pPr algn="ctr"/>
+            <a:r>
+              <a:rPr sz="1600" b="1">
+                <a:solidFill>
+                  <a:srgbClr val="FFFFFF"/>
+                </a:solidFill>
+                <a:latin typeface="Calibri"/>
+              </a:rPr>
+              <a:t>3</a:t>
+            </a:r>
+          </a:p>
         </p:txBody>
       </p:sp>
       <p:sp>
@@ -6962,178 +9446,60 @@
         </p:nvSpPr>
         <p:spPr>
           <a:xfrm>
-            <a:off x="6507327" y="1600200"/>
-            <a:ext cx="4907127" cy="640080"/>
-          </a:xfrm>
-          <a:prstGeom prst="rect">
-            <a:avLst/>
-          </a:prstGeom>
-          <a:noFill/>
-        </p:spPr>
-        <p:txBody>
-          <a:bodyPr wrap="square" anchor="ctr" lIns="0" rIns="0" tIns="0" bIns="0"/>
+            <a:off x="1371600" y="4480560"/>
+            <a:ext cx="10271455" cy="1188720"/>
+          </a:xfrm>
+          <a:prstGeom prst="rect">
+            <a:avLst/>
+          </a:prstGeom>
+          <a:noFill/>
+        </p:spPr>
+        <p:txBody>
+          <a:bodyPr wrap="square" anchor="t" lIns="0" rIns="0" tIns="0" bIns="0"/>
           <a:lstStyle/>
           <a:p>
             <a:pPr algn="l"/>
             <a:r>
-              <a:rPr sz="2000" b="1" i="0">
-                <a:solidFill>
-                  <a:srgbClr val="FFFFFF"/>
-                </a:solidFill>
-                <a:latin typeface="Calibri"/>
-              </a:rPr>
-              <a:t>Audiences</a:t>
-            </a:r>
-          </a:p>
-        </p:txBody>
-      </p:sp>
-      <p:sp>
-        <p:nvSpPr>
-          <p:cNvPr id="12" name="Rounded Rectangle 11"/>
-          <p:cNvSpPr/>
-          <p:nvPr/>
-        </p:nvSpPr>
-        <p:spPr>
-          <a:xfrm>
-            <a:off x="6278727" y="2377440"/>
-            <a:ext cx="5364327" cy="3794760"/>
-          </a:xfrm>
-          <a:prstGeom prst="roundRect">
-            <a:avLst>
-              <a:gd name="adj" fmla="val 4000"/>
-            </a:avLst>
-          </a:prstGeom>
-          <a:solidFill>
-            <a:srgbClr val="EAF3FF"/>
-          </a:solidFill>
-          <a:ln>
-            <a:noFill/>
-          </a:ln>
-          <a:effectLst/>
-        </p:spPr>
-        <p:style>
-          <a:lnRef idx="1">
-            <a:schemeClr val="accent1"/>
-          </a:lnRef>
-          <a:fillRef idx="3">
-            <a:schemeClr val="accent1"/>
-          </a:fillRef>
-          <a:effectRef idx="2">
-            <a:schemeClr val="accent1"/>
-          </a:effectRef>
-          <a:fontRef idx="minor">
-            <a:schemeClr val="lt1"/>
-          </a:fontRef>
-        </p:style>
-        <p:txBody>
-          <a:bodyPr rtlCol="0" anchor="ctr"/>
-          <a:lstStyle/>
-          <a:p/>
-        </p:txBody>
-      </p:sp>
-      <p:sp>
-        <p:nvSpPr>
-          <p:cNvPr id="13" name="TextBox 12"/>
+              <a:rPr sz="2400" b="0" i="0">
+                <a:solidFill>
+                  <a:srgbClr val="202122"/>
+                </a:solidFill>
+                <a:latin typeface="Calibri"/>
+              </a:rPr>
+              <a:t>Which standard covers drawing conventions?</a:t>
+            </a:r>
+          </a:p>
+        </p:txBody>
+      </p:sp>
+      <p:sp>
+        <p:nvSpPr>
+          <p:cNvPr id="12" name="TextBox 11"/>
           <p:cNvSpPr txBox="1"/>
           <p:nvPr/>
         </p:nvSpPr>
         <p:spPr>
           <a:xfrm>
-            <a:off x="6553047" y="2606040"/>
-            <a:ext cx="4815687" cy="3337560"/>
-          </a:xfrm>
-          <a:prstGeom prst="rect">
-            <a:avLst/>
-          </a:prstGeom>
-          <a:noFill/>
-        </p:spPr>
-        <p:txBody>
-          <a:bodyPr wrap="square" lIns="0" rIns="0" tIns="0" bIns="0">
-            <a:spAutoFit/>
-          </a:bodyPr>
-          <a:lstStyle/>
-          <a:p>
-            <a:pPr marL="274320" indent="-274320">
-              <a:spcAft>
-                <a:spcPts val="990"/>
-              </a:spcAft>
-              <a:buClr>
-                <a:srgbClr val="0645AD"/>
-              </a:buClr>
-              <a:buFont typeface="Arial"/>
-              <a:buChar char="•"/>
-            </a:pPr>
-            <a:r>
-              <a:rPr sz="2200" b="0">
-                <a:solidFill>
-                  <a:srgbClr val="202122"/>
-                </a:solidFill>
-                <a:latin typeface="Calibri"/>
-              </a:rPr>
-              <a:t>Designers</a:t>
-            </a:r>
-          </a:p>
-          <a:p>
-            <a:pPr marL="274320" indent="-274320">
-              <a:spcAft>
-                <a:spcPts val="990"/>
-              </a:spcAft>
-              <a:buClr>
-                <a:srgbClr val="0645AD"/>
-              </a:buClr>
-              <a:buFont typeface="Arial"/>
-              <a:buChar char="•"/>
-            </a:pPr>
-            <a:r>
-              <a:rPr sz="2200" b="0">
-                <a:solidFill>
-                  <a:srgbClr val="202122"/>
-                </a:solidFill>
-                <a:latin typeface="Calibri"/>
-              </a:rPr>
-              <a:t>Manufacturing engineers</a:t>
-            </a:r>
-          </a:p>
-          <a:p>
-            <a:pPr marL="274320" indent="-274320">
-              <a:spcAft>
-                <a:spcPts val="990"/>
-              </a:spcAft>
-              <a:buClr>
-                <a:srgbClr val="0645AD"/>
-              </a:buClr>
-              <a:buFont typeface="Arial"/>
-              <a:buChar char="•"/>
-            </a:pPr>
-            <a:r>
-              <a:rPr sz="2200" b="0">
-                <a:solidFill>
-                  <a:srgbClr val="202122"/>
-                </a:solidFill>
-                <a:latin typeface="Calibri"/>
-              </a:rPr>
-              <a:t>Customers</a:t>
-            </a:r>
-          </a:p>
-          <a:p>
-            <a:pPr marL="274320" indent="-274320">
-              <a:spcAft>
-                <a:spcPts val="990"/>
-              </a:spcAft>
-              <a:buClr>
-                <a:srgbClr val="0645AD"/>
-              </a:buClr>
-              <a:buFont typeface="Arial"/>
-              <a:buChar char="•"/>
-            </a:pPr>
-            <a:r>
-              <a:rPr sz="2200" b="0">
-                <a:solidFill>
-                  <a:srgbClr val="202122"/>
-                </a:solidFill>
-                <a:latin typeface="Calibri"/>
-              </a:rPr>
-              <a:t>Non-technical personnel</a:t>
+            <a:off x="548640" y="5852160"/>
+            <a:ext cx="11094415" cy="365760"/>
+          </a:xfrm>
+          <a:prstGeom prst="rect">
+            <a:avLst/>
+          </a:prstGeom>
+          <a:noFill/>
+        </p:spPr>
+        <p:txBody>
+          <a:bodyPr wrap="square" anchor="t" lIns="0" rIns="0" tIns="0" bIns="0"/>
+          <a:lstStyle/>
+          <a:p>
+            <a:pPr algn="l"/>
+            <a:r>
+              <a:rPr sz="1300" b="0" i="1">
+                <a:solidFill>
+                  <a:srgbClr val="54595D"/>
+                </a:solidFill>
+                <a:latin typeface="Calibri"/>
+              </a:rPr>
+              <a:t>Answer on mini whiteboards or in your book. Answers are in the speaker notes.</a:t>
             </a:r>
           </a:p>
         </p:txBody>
@@ -7225,7 +9591,7 @@
                 </a:solidFill>
                 <a:latin typeface="Cambria"/>
               </a:rPr>
-              <a:t>Digital tools</a:t>
+              <a:t>Standards bodies</a:t>
             </a:r>
           </a:p>
         </p:txBody>
@@ -7305,7 +9671,7 @@
         <p:spPr>
           <a:xfrm>
             <a:off x="548640" y="1600200"/>
-            <a:ext cx="5410047" cy="2148840"/>
+            <a:ext cx="3515258" cy="4572000"/>
           </a:xfrm>
           <a:prstGeom prst="roundRect">
             <a:avLst>
@@ -7402,7 +9768,7 @@
         <p:spPr>
           <a:xfrm>
             <a:off x="1371600" y="1801368"/>
-            <a:ext cx="4404207" cy="512064"/>
+            <a:ext cx="2509418" cy="512064"/>
           </a:xfrm>
           <a:prstGeom prst="rect">
             <a:avLst/>
@@ -7421,7 +9787,7 @@
                 </a:solidFill>
                 <a:latin typeface="Calibri"/>
               </a:rPr>
-              <a:t>2D CAD</a:t>
+              <a:t>BSI</a:t>
             </a:r>
           </a:p>
         </p:txBody>
@@ -7435,7 +9801,7 @@
         <p:spPr>
           <a:xfrm>
             <a:off x="777240" y="2468880"/>
-            <a:ext cx="4952847" cy="1143000"/>
+            <a:ext cx="3058058" cy="3566160"/>
           </a:xfrm>
           <a:prstGeom prst="rect">
             <a:avLst/>
@@ -7454,7 +9820,7 @@
                 </a:solidFill>
                 <a:latin typeface="Calibri"/>
               </a:rPr>
-              <a:t>Fast, clear drawings for manufacture.</a:t>
+              <a:t>British Standards Institution: UK standards.</a:t>
             </a:r>
           </a:p>
         </p:txBody>
@@ -7467,8 +9833,8 @@
         </p:nvSpPr>
         <p:spPr>
           <a:xfrm>
-            <a:off x="6233007" y="1600200"/>
-            <a:ext cx="5410047" cy="2148840"/>
+            <a:off x="4338218" y="1600200"/>
+            <a:ext cx="3515258" cy="4572000"/>
           </a:xfrm>
           <a:prstGeom prst="roundRect">
             <a:avLst>
@@ -7511,7 +9877,7 @@
         </p:nvSpPr>
         <p:spPr>
           <a:xfrm>
-            <a:off x="6461607" y="1828800"/>
+            <a:off x="4566818" y="1828800"/>
             <a:ext cx="457200" cy="457200"/>
           </a:xfrm>
           <a:prstGeom prst="ellipse">
@@ -7564,8 +9930,8 @@
         </p:nvSpPr>
         <p:spPr>
           <a:xfrm>
-            <a:off x="7055967" y="1801368"/>
-            <a:ext cx="4404207" cy="512064"/>
+            <a:off x="5161178" y="1801368"/>
+            <a:ext cx="2509418" cy="512064"/>
           </a:xfrm>
           <a:prstGeom prst="rect">
             <a:avLst/>
@@ -7584,7 +9950,7 @@
                 </a:solidFill>
                 <a:latin typeface="Calibri"/>
               </a:rPr>
-              <a:t>3D CAD</a:t>
+              <a:t>ISO</a:t>
             </a:r>
           </a:p>
         </p:txBody>
@@ -7597,8 +9963,8 @@
         </p:nvSpPr>
         <p:spPr>
           <a:xfrm>
-            <a:off x="6461607" y="2468880"/>
-            <a:ext cx="4952847" cy="1143000"/>
+            <a:off x="4566818" y="2468880"/>
+            <a:ext cx="3058058" cy="3566160"/>
           </a:xfrm>
           <a:prstGeom prst="rect">
             <a:avLst/>
@@ -7617,7 +9983,7 @@
                 </a:solidFill>
                 <a:latin typeface="Calibri"/>
               </a:rPr>
-              <a:t>Solid models, assemblies and clash checks.</a:t>
+              <a:t>International Organization for Standardization.</a:t>
             </a:r>
           </a:p>
         </p:txBody>
@@ -7630,8 +9996,8 @@
         </p:nvSpPr>
         <p:spPr>
           <a:xfrm>
-            <a:off x="548640" y="4023360"/>
-            <a:ext cx="5410047" cy="2148840"/>
+            <a:off x="8127796" y="1600200"/>
+            <a:ext cx="3515258" cy="4572000"/>
           </a:xfrm>
           <a:prstGeom prst="roundRect">
             <a:avLst>
@@ -7674,7 +10040,7 @@
         </p:nvSpPr>
         <p:spPr>
           <a:xfrm>
-            <a:off x="777240" y="4251960"/>
+            <a:off x="8356396" y="1828800"/>
             <a:ext cx="457200" cy="457200"/>
           </a:xfrm>
           <a:prstGeom prst="ellipse">
@@ -7727,8 +10093,8 @@
         </p:nvSpPr>
         <p:spPr>
           <a:xfrm>
-            <a:off x="1371600" y="4224528"/>
-            <a:ext cx="4404207" cy="512064"/>
+            <a:off x="8950756" y="1801368"/>
+            <a:ext cx="2509418" cy="512064"/>
           </a:xfrm>
           <a:prstGeom prst="rect">
             <a:avLst/>
@@ -7747,7 +10113,7 @@
                 </a:solidFill>
                 <a:latin typeface="Calibri"/>
               </a:rPr>
-              <a:t>CAD to CAM</a:t>
+              <a:t>IMechE</a:t>
             </a:r>
           </a:p>
         </p:txBody>
@@ -7760,8 +10126,8 @@
         </p:nvSpPr>
         <p:spPr>
           <a:xfrm>
-            <a:off x="777240" y="4892040"/>
-            <a:ext cx="4952847" cy="1143000"/>
+            <a:off x="8356396" y="2468880"/>
+            <a:ext cx="3058058" cy="3566160"/>
           </a:xfrm>
           <a:prstGeom prst="rect">
             <a:avLst/>
@@ -7780,170 +10146,7 @@
                 </a:solidFill>
                 <a:latin typeface="Calibri"/>
               </a:rPr>
-              <a:t>Toolpaths sent by direct entry, intranet or Wi-Fi to CNC machines.</a:t>
-            </a:r>
-          </a:p>
-        </p:txBody>
-      </p:sp>
-      <p:sp>
-        <p:nvSpPr>
-          <p:cNvPr id="18" name="Rounded Rectangle 17"/>
-          <p:cNvSpPr/>
-          <p:nvPr/>
-        </p:nvSpPr>
-        <p:spPr>
-          <a:xfrm>
-            <a:off x="6233007" y="4023360"/>
-            <a:ext cx="5410047" cy="2148840"/>
-          </a:xfrm>
-          <a:prstGeom prst="roundRect">
-            <a:avLst>
-              <a:gd name="adj" fmla="val 6000"/>
-            </a:avLst>
-          </a:prstGeom>
-          <a:solidFill>
-            <a:srgbClr val="EAF3FF"/>
-          </a:solidFill>
-          <a:ln>
-            <a:noFill/>
-          </a:ln>
-          <a:effectLst/>
-        </p:spPr>
-        <p:style>
-          <a:lnRef idx="1">
-            <a:schemeClr val="accent1"/>
-          </a:lnRef>
-          <a:fillRef idx="3">
-            <a:schemeClr val="accent1"/>
-          </a:fillRef>
-          <a:effectRef idx="2">
-            <a:schemeClr val="accent1"/>
-          </a:effectRef>
-          <a:fontRef idx="minor">
-            <a:schemeClr val="lt1"/>
-          </a:fontRef>
-        </p:style>
-        <p:txBody>
-          <a:bodyPr rtlCol="0" anchor="ctr"/>
-          <a:lstStyle/>
-          <a:p/>
-        </p:txBody>
-      </p:sp>
-      <p:sp>
-        <p:nvSpPr>
-          <p:cNvPr id="19" name="Oval 18"/>
-          <p:cNvSpPr/>
-          <p:nvPr/>
-        </p:nvSpPr>
-        <p:spPr>
-          <a:xfrm>
-            <a:off x="6461607" y="4251960"/>
-            <a:ext cx="457200" cy="457200"/>
-          </a:xfrm>
-          <a:prstGeom prst="ellipse">
-            <a:avLst/>
-          </a:prstGeom>
-          <a:solidFill>
-            <a:srgbClr val="E0463A"/>
-          </a:solidFill>
-          <a:ln>
-            <a:noFill/>
-          </a:ln>
-          <a:effectLst/>
-        </p:spPr>
-        <p:style>
-          <a:lnRef idx="1">
-            <a:schemeClr val="accent1"/>
-          </a:lnRef>
-          <a:fillRef idx="3">
-            <a:schemeClr val="accent1"/>
-          </a:fillRef>
-          <a:effectRef idx="2">
-            <a:schemeClr val="accent1"/>
-          </a:effectRef>
-          <a:fontRef idx="minor">
-            <a:schemeClr val="lt1"/>
-          </a:fontRef>
-        </p:style>
-        <p:txBody>
-          <a:bodyPr rtlCol="0" anchor="ctr" lIns="0" rIns="0" tIns="0" bIns="0"/>
-          <a:lstStyle/>
-          <a:p>
-            <a:pPr algn="ctr"/>
-            <a:r>
-              <a:rPr sz="1500" b="1">
-                <a:solidFill>
-                  <a:srgbClr val="FFFFFF"/>
-                </a:solidFill>
-                <a:latin typeface="Calibri"/>
-              </a:rPr>
-              <a:t>4</a:t>
-            </a:r>
-          </a:p>
-        </p:txBody>
-      </p:sp>
-      <p:sp>
-        <p:nvSpPr>
-          <p:cNvPr id="20" name="TextBox 19"/>
-          <p:cNvSpPr txBox="1"/>
-          <p:nvPr/>
-        </p:nvSpPr>
-        <p:spPr>
-          <a:xfrm>
-            <a:off x="7055967" y="4224528"/>
-            <a:ext cx="4404207" cy="512064"/>
-          </a:xfrm>
-          <a:prstGeom prst="rect">
-            <a:avLst/>
-          </a:prstGeom>
-          <a:noFill/>
-        </p:spPr>
-        <p:txBody>
-          <a:bodyPr wrap="square" anchor="ctr" lIns="0" rIns="0" tIns="0" bIns="0"/>
-          <a:lstStyle/>
-          <a:p>
-            <a:pPr algn="l"/>
-            <a:r>
-              <a:rPr sz="1900" b="1" i="0">
-                <a:solidFill>
-                  <a:srgbClr val="03306E"/>
-                </a:solidFill>
-                <a:latin typeface="Calibri"/>
-              </a:rPr>
-              <a:t>CAE and visualisation</a:t>
-            </a:r>
-          </a:p>
-        </p:txBody>
-      </p:sp>
-      <p:sp>
-        <p:nvSpPr>
-          <p:cNvPr id="21" name="TextBox 20"/>
-          <p:cNvSpPr txBox="1"/>
-          <p:nvPr/>
-        </p:nvSpPr>
-        <p:spPr>
-          <a:xfrm>
-            <a:off x="6461607" y="4892040"/>
-            <a:ext cx="4952847" cy="1143000"/>
-          </a:xfrm>
-          <a:prstGeom prst="rect">
-            <a:avLst/>
-          </a:prstGeom>
-          <a:noFill/>
-        </p:spPr>
-        <p:txBody>
-          <a:bodyPr wrap="square" anchor="t" lIns="0" rIns="0" tIns="0" bIns="0"/>
-          <a:lstStyle/>
-          <a:p>
-            <a:pPr algn="l"/>
-            <a:r>
-              <a:rPr sz="2000" b="0" i="0">
-                <a:solidFill>
-                  <a:srgbClr val="202122"/>
-                </a:solidFill>
-                <a:latin typeface="Calibri"/>
-              </a:rPr>
-              <a:t>Simulate assembly performance; render for customers.</a:t>
+              <a:t>Institution of Mechanical Engineers: professional codes and guidance.</a:t>
             </a:r>
           </a:p>
         </p:txBody>
@@ -8035,7 +10238,7 @@
                 </a:solidFill>
                 <a:latin typeface="Cambria"/>
               </a:rPr>
-              <a:t>Check your understanding</a:t>
+              <a:t>Communicating engineering information</a:t>
             </a:r>
           </a:p>
         </p:txBody>
@@ -8108,14 +10311,147 @@
       </p:sp>
       <p:sp>
         <p:nvSpPr>
-          <p:cNvPr id="6" name="Oval 5"/>
+          <p:cNvPr id="6" name="TextBox 5"/>
+          <p:cNvSpPr txBox="1"/>
+          <p:nvPr/>
+        </p:nvSpPr>
+        <p:spPr>
+          <a:xfrm>
+            <a:off x="548640" y="1554480"/>
+            <a:ext cx="6720840" cy="4617720"/>
+          </a:xfrm>
+          <a:prstGeom prst="rect">
+            <a:avLst/>
+          </a:prstGeom>
+          <a:noFill/>
+        </p:spPr>
+        <p:txBody>
+          <a:bodyPr wrap="square" lIns="0" rIns="0" tIns="0" bIns="0">
+            <a:spAutoFit/>
+          </a:bodyPr>
+          <a:lstStyle/>
+          <a:p>
+            <a:pPr>
+              <a:spcAft>
+                <a:spcPts val="1320"/>
+              </a:spcAft>
+            </a:pPr>
+            <a:r>
+              <a:rPr sz="2200" b="0">
+                <a:solidFill>
+                  <a:srgbClr val="202122"/>
+                </a:solidFill>
+                <a:latin typeface="Calibri"/>
+              </a:rPr>
+              <a:t>Engineering information is shared as CAD models and drawings, written specifications, SOPs and reports, presentations, graphs of test data and SPC, and CNC programs sent to machines.</a:t>
+            </a:r>
+          </a:p>
+          <a:p>
+            <a:pPr>
+              <a:spcAft>
+                <a:spcPts val="1320"/>
+              </a:spcAft>
+            </a:pPr>
+            <a:r>
+              <a:rPr sz="2200" b="1">
+                <a:solidFill>
+                  <a:srgbClr val="202122"/>
+                </a:solidFill>
+                <a:latin typeface="Calibri"/>
+              </a:rPr>
+              <a:t>The audience decides the format:</a:t>
+            </a:r>
+            <a:r>
+              <a:rPr sz="2200" b="0">
+                <a:solidFill>
+                  <a:srgbClr val="202122"/>
+                </a:solidFill>
+                <a:latin typeface="Calibri"/>
+              </a:rPr>
+              <a:t> designers and manufacturing engineers need precise drawings and data; customers need clear visuals; non-technical staff need plain summaries.</a:t>
+            </a:r>
+          </a:p>
+          <a:p>
+            <a:pPr>
+              <a:spcAft>
+                <a:spcPts val="1320"/>
+              </a:spcAft>
+            </a:pPr>
+            <a:r>
+              <a:rPr sz="2200" b="1">
+                <a:solidFill>
+                  <a:srgbClr val="202122"/>
+                </a:solidFill>
+                <a:latin typeface="Calibri"/>
+              </a:rPr>
+              <a:t>Digital tools help:</a:t>
+            </a:r>
+            <a:r>
+              <a:rPr sz="2200" b="0">
+                <a:solidFill>
+                  <a:srgbClr val="202122"/>
+                </a:solidFill>
+                <a:latin typeface="Calibri"/>
+              </a:rPr>
+              <a:t> 2D CAD for manufacturing drawings, 3D CAD for models and assemblies, CAE to simulate performance, and CAD to CAM transfer to send toolpaths to CNC machines.</a:t>
+            </a:r>
+          </a:p>
+        </p:txBody>
+      </p:sp>
+      <p:sp>
+        <p:nvSpPr>
+          <p:cNvPr id="7" name="Rounded Rectangle 6"/>
           <p:cNvSpPr/>
           <p:nvPr/>
         </p:nvSpPr>
         <p:spPr>
           <a:xfrm>
-            <a:off x="548640" y="1618488"/>
-            <a:ext cx="411480" cy="411480"/>
+            <a:off x="7772400" y="1554480"/>
+            <a:ext cx="3867912" cy="4526280"/>
+          </a:xfrm>
+          <a:prstGeom prst="roundRect">
+            <a:avLst>
+              <a:gd name="adj" fmla="val 8000"/>
+            </a:avLst>
+          </a:prstGeom>
+          <a:solidFill>
+            <a:srgbClr val="03306E"/>
+          </a:solidFill>
+          <a:ln>
+            <a:noFill/>
+          </a:ln>
+          <a:effectLst/>
+        </p:spPr>
+        <p:style>
+          <a:lnRef idx="1">
+            <a:schemeClr val="accent1"/>
+          </a:lnRef>
+          <a:fillRef idx="3">
+            <a:schemeClr val="accent1"/>
+          </a:fillRef>
+          <a:effectRef idx="2">
+            <a:schemeClr val="accent1"/>
+          </a:effectRef>
+          <a:fontRef idx="minor">
+            <a:schemeClr val="lt1"/>
+          </a:fontRef>
+        </p:style>
+        <p:txBody>
+          <a:bodyPr rtlCol="0" anchor="ctr"/>
+          <a:lstStyle/>
+          <a:p/>
+        </p:txBody>
+      </p:sp>
+      <p:sp>
+        <p:nvSpPr>
+          <p:cNvPr id="8" name="Oval 7"/>
+          <p:cNvSpPr/>
+          <p:nvPr/>
+        </p:nvSpPr>
+        <p:spPr>
+          <a:xfrm>
+            <a:off x="8046720" y="1828800"/>
+            <a:ext cx="548640" cy="548640"/>
           </a:xfrm>
           <a:prstGeom prst="ellipse">
             <a:avLst/>
@@ -8148,99 +10484,13 @@
           <a:p>
             <a:pPr algn="ctr"/>
             <a:r>
-              <a:rPr sz="1400" b="1">
+              <a:rPr sz="1300" b="1">
                 <a:solidFill>
                   <a:srgbClr val="FFFFFF"/>
                 </a:solidFill>
                 <a:latin typeface="Calibri"/>
               </a:rPr>
-              <a:t>1</a:t>
-            </a:r>
-          </a:p>
-        </p:txBody>
-      </p:sp>
-      <p:sp>
-        <p:nvSpPr>
-          <p:cNvPr id="7" name="TextBox 6"/>
-          <p:cNvSpPr txBox="1"/>
-          <p:nvPr/>
-        </p:nvSpPr>
-        <p:spPr>
-          <a:xfrm>
-            <a:off x="1234440" y="1600200"/>
-            <a:ext cx="10408615" cy="1030986"/>
-          </a:xfrm>
-          <a:prstGeom prst="rect">
-            <a:avLst/>
-          </a:prstGeom>
-          <a:noFill/>
-        </p:spPr>
-        <p:txBody>
-          <a:bodyPr wrap="square" anchor="t" lIns="0" rIns="0" tIns="0" bIns="0"/>
-          <a:lstStyle/>
-          <a:p>
-            <a:pPr algn="l"/>
-            <a:r>
-              <a:rPr sz="2200" b="0" i="0">
-                <a:solidFill>
-                  <a:srgbClr val="202122"/>
-                </a:solidFill>
-                <a:latin typeface="Calibri"/>
-              </a:rPr>
-              <a:t>Which standard covers technical drawings?</a:t>
-            </a:r>
-          </a:p>
-        </p:txBody>
-      </p:sp>
-      <p:sp>
-        <p:nvSpPr>
-          <p:cNvPr id="8" name="Oval 7"/>
-          <p:cNvSpPr/>
-          <p:nvPr/>
-        </p:nvSpPr>
-        <p:spPr>
-          <a:xfrm>
-            <a:off x="548640" y="2814066"/>
-            <a:ext cx="411480" cy="411480"/>
-          </a:xfrm>
-          <a:prstGeom prst="ellipse">
-            <a:avLst/>
-          </a:prstGeom>
-          <a:solidFill>
-            <a:srgbClr val="E0463A"/>
-          </a:solidFill>
-          <a:ln>
-            <a:noFill/>
-          </a:ln>
-          <a:effectLst/>
-        </p:spPr>
-        <p:style>
-          <a:lnRef idx="1">
-            <a:schemeClr val="accent1"/>
-          </a:lnRef>
-          <a:fillRef idx="3">
-            <a:schemeClr val="accent1"/>
-          </a:fillRef>
-          <a:effectRef idx="2">
-            <a:schemeClr val="accent1"/>
-          </a:effectRef>
-          <a:fontRef idx="minor">
-            <a:schemeClr val="lt1"/>
-          </a:fontRef>
-        </p:style>
-        <p:txBody>
-          <a:bodyPr rtlCol="0" anchor="ctr" lIns="0" rIns="0" tIns="0" bIns="0"/>
-          <a:lstStyle/>
-          <a:p>
-            <a:pPr algn="ctr"/>
-            <a:r>
-              <a:rPr sz="1400" b="1">
-                <a:solidFill>
-                  <a:srgbClr val="FFFFFF"/>
-                </a:solidFill>
-                <a:latin typeface="Calibri"/>
-              </a:rPr>
-              <a:t>2</a:t>
+              <a:t>e.g.</a:t>
             </a:r>
           </a:p>
         </p:txBody>
@@ -8253,8 +10503,8 @@
         </p:nvSpPr>
         <p:spPr>
           <a:xfrm>
-            <a:off x="1234440" y="2795778"/>
-            <a:ext cx="10408615" cy="1030986"/>
+            <a:off x="8046720" y="2560320"/>
+            <a:ext cx="3291840" cy="365760"/>
           </a:xfrm>
           <a:prstGeom prst="rect">
             <a:avLst/>
@@ -8267,185 +10517,46 @@
           <a:p>
             <a:pPr algn="l"/>
             <a:r>
-              <a:rPr sz="2200" b="0" i="0">
-                <a:solidFill>
-                  <a:srgbClr val="202122"/>
-                </a:solidFill>
-                <a:latin typeface="Calibri"/>
-              </a:rPr>
-              <a:t>What does a section view show?</a:t>
-            </a:r>
-          </a:p>
-        </p:txBody>
-      </p:sp>
-      <p:sp>
-        <p:nvSpPr>
-          <p:cNvPr id="10" name="Oval 9"/>
-          <p:cNvSpPr/>
-          <p:nvPr/>
-        </p:nvSpPr>
-        <p:spPr>
-          <a:xfrm>
-            <a:off x="548640" y="4009644"/>
-            <a:ext cx="411480" cy="411480"/>
-          </a:xfrm>
-          <a:prstGeom prst="ellipse">
-            <a:avLst/>
-          </a:prstGeom>
-          <a:solidFill>
-            <a:srgbClr val="E0463A"/>
-          </a:solidFill>
-          <a:ln>
-            <a:noFill/>
-          </a:ln>
-          <a:effectLst/>
-        </p:spPr>
-        <p:style>
-          <a:lnRef idx="1">
-            <a:schemeClr val="accent1"/>
-          </a:lnRef>
-          <a:fillRef idx="3">
-            <a:schemeClr val="accent1"/>
-          </a:fillRef>
-          <a:effectRef idx="2">
-            <a:schemeClr val="accent1"/>
-          </a:effectRef>
-          <a:fontRef idx="minor">
-            <a:schemeClr val="lt1"/>
-          </a:fontRef>
-        </p:style>
-        <p:txBody>
-          <a:bodyPr rtlCol="0" anchor="ctr" lIns="0" rIns="0" tIns="0" bIns="0"/>
-          <a:lstStyle/>
-          <a:p>
-            <a:pPr algn="ctr"/>
-            <a:r>
-              <a:rPr sz="1400" b="1">
+              <a:rPr sz="1300" b="1" i="0">
+                <a:solidFill>
+                  <a:srgbClr val="A9C8F0"/>
+                </a:solidFill>
+                <a:latin typeface="Calibri"/>
+              </a:rPr>
+              <a:t>EXAMPLE</a:t>
+            </a:r>
+          </a:p>
+        </p:txBody>
+      </p:sp>
+      <p:sp>
+        <p:nvSpPr>
+          <p:cNvPr id="10" name="TextBox 9"/>
+          <p:cNvSpPr txBox="1"/>
+          <p:nvPr/>
+        </p:nvSpPr>
+        <p:spPr>
+          <a:xfrm>
+            <a:off x="8046720" y="2971800"/>
+            <a:ext cx="3291840" cy="2971800"/>
+          </a:xfrm>
+          <a:prstGeom prst="rect">
+            <a:avLst/>
+          </a:prstGeom>
+          <a:noFill/>
+        </p:spPr>
+        <p:txBody>
+          <a:bodyPr wrap="square" anchor="t" lIns="0" rIns="0" tIns="0" bIns="0"/>
+          <a:lstStyle/>
+          <a:p>
+            <a:pPr algn="l"/>
+            <a:r>
+              <a:rPr sz="1900" b="0" i="0">
                 <a:solidFill>
                   <a:srgbClr val="FFFFFF"/>
                 </a:solidFill>
-                <a:latin typeface="Calibri"/>
-              </a:rPr>
-              <a:t>3</a:t>
-            </a:r>
-          </a:p>
-        </p:txBody>
-      </p:sp>
-      <p:sp>
-        <p:nvSpPr>
-          <p:cNvPr id="11" name="TextBox 10"/>
-          <p:cNvSpPr txBox="1"/>
-          <p:nvPr/>
-        </p:nvSpPr>
-        <p:spPr>
-          <a:xfrm>
-            <a:off x="1234440" y="3991356"/>
-            <a:ext cx="10408615" cy="1030986"/>
-          </a:xfrm>
-          <a:prstGeom prst="rect">
-            <a:avLst/>
-          </a:prstGeom>
-          <a:noFill/>
-        </p:spPr>
-        <p:txBody>
-          <a:bodyPr wrap="square" anchor="t" lIns="0" rIns="0" tIns="0" bIns="0"/>
-          <a:lstStyle/>
-          <a:p>
-            <a:pPr algn="l"/>
-            <a:r>
-              <a:rPr sz="2200" b="0" i="0">
-                <a:solidFill>
-                  <a:srgbClr val="202122"/>
-                </a:solidFill>
-                <a:latin typeface="Calibri"/>
-              </a:rPr>
-              <a:t>What is CAE used for?</a:t>
-            </a:r>
-          </a:p>
-        </p:txBody>
-      </p:sp>
-      <p:sp>
-        <p:nvSpPr>
-          <p:cNvPr id="12" name="Oval 11"/>
-          <p:cNvSpPr/>
-          <p:nvPr/>
-        </p:nvSpPr>
-        <p:spPr>
-          <a:xfrm>
-            <a:off x="548640" y="5205221"/>
-            <a:ext cx="411480" cy="411480"/>
-          </a:xfrm>
-          <a:prstGeom prst="ellipse">
-            <a:avLst/>
-          </a:prstGeom>
-          <a:solidFill>
-            <a:srgbClr val="E0463A"/>
-          </a:solidFill>
-          <a:ln>
-            <a:noFill/>
-          </a:ln>
-          <a:effectLst/>
-        </p:spPr>
-        <p:style>
-          <a:lnRef idx="1">
-            <a:schemeClr val="accent1"/>
-          </a:lnRef>
-          <a:fillRef idx="3">
-            <a:schemeClr val="accent1"/>
-          </a:fillRef>
-          <a:effectRef idx="2">
-            <a:schemeClr val="accent1"/>
-          </a:effectRef>
-          <a:fontRef idx="minor">
-            <a:schemeClr val="lt1"/>
-          </a:fontRef>
-        </p:style>
-        <p:txBody>
-          <a:bodyPr rtlCol="0" anchor="ctr" lIns="0" rIns="0" tIns="0" bIns="0"/>
-          <a:lstStyle/>
-          <a:p>
-            <a:pPr algn="ctr"/>
-            <a:r>
-              <a:rPr sz="1400" b="1">
-                <a:solidFill>
-                  <a:srgbClr val="FFFFFF"/>
-                </a:solidFill>
-                <a:latin typeface="Calibri"/>
-              </a:rPr>
-              <a:t>4</a:t>
-            </a:r>
-          </a:p>
-        </p:txBody>
-      </p:sp>
-      <p:sp>
-        <p:nvSpPr>
-          <p:cNvPr id="13" name="TextBox 12"/>
-          <p:cNvSpPr txBox="1"/>
-          <p:nvPr/>
-        </p:nvSpPr>
-        <p:spPr>
-          <a:xfrm>
-            <a:off x="1234440" y="5186933"/>
-            <a:ext cx="10408615" cy="1030986"/>
-          </a:xfrm>
-          <a:prstGeom prst="rect">
-            <a:avLst/>
-          </a:prstGeom>
-          <a:noFill/>
-        </p:spPr>
-        <p:txBody>
-          <a:bodyPr wrap="square" anchor="t" lIns="0" rIns="0" tIns="0" bIns="0"/>
-          <a:lstStyle/>
-          <a:p>
-            <a:pPr algn="l"/>
-            <a:r>
-              <a:rPr sz="2200" b="0" i="0">
-                <a:solidFill>
-                  <a:srgbClr val="202122"/>
-                </a:solidFill>
-                <a:latin typeface="Calibri"/>
-              </a:rPr>
-              <a:t>Who is IMechE?</a:t>
+                <a:latin typeface="Cambria"/>
+              </a:rPr>
+              <a:t>The same bracket: a toleranced drawing for the machinist, a rendered 3D image for the customer, and a one-paragraph cost summary for the manager.</a:t>
             </a:r>
           </a:p>
         </p:txBody>
@@ -8537,7 +10648,7 @@
                 </a:solidFill>
                 <a:latin typeface="Cambria"/>
               </a:rPr>
-              <a:t>Answers</a:t>
+              <a:t>Communicating engineering information</a:t>
             </a:r>
           </a:p>
         </p:txBody>
@@ -8610,20 +10721,22 @@
       </p:sp>
       <p:sp>
         <p:nvSpPr>
-          <p:cNvPr id="6" name="Oval 5"/>
+          <p:cNvPr id="6" name="Rounded Rectangle 5"/>
           <p:cNvSpPr/>
           <p:nvPr/>
         </p:nvSpPr>
         <p:spPr>
           <a:xfrm>
-            <a:off x="548640" y="1618488"/>
-            <a:ext cx="411480" cy="411480"/>
-          </a:xfrm>
-          <a:prstGeom prst="ellipse">
-            <a:avLst/>
+            <a:off x="548640" y="1600200"/>
+            <a:ext cx="5364327" cy="640080"/>
+          </a:xfrm>
+          <a:prstGeom prst="roundRect">
+            <a:avLst>
+              <a:gd name="adj" fmla="val 15000"/>
+            </a:avLst>
           </a:prstGeom>
           <a:solidFill>
-            <a:srgbClr val="E0463A"/>
+            <a:srgbClr val="03306E"/>
           </a:solidFill>
           <a:ln>
             <a:noFill/>
@@ -8645,20 +10758,9 @@
           </a:fontRef>
         </p:style>
         <p:txBody>
-          <a:bodyPr rtlCol="0" anchor="ctr" lIns="0" rIns="0" tIns="0" bIns="0"/>
-          <a:lstStyle/>
-          <a:p>
-            <a:pPr algn="ctr"/>
-            <a:r>
-              <a:rPr sz="1400" b="1">
-                <a:solidFill>
-                  <a:srgbClr val="FFFFFF"/>
-                </a:solidFill>
-                <a:latin typeface="Calibri"/>
-              </a:rPr>
-              <a:t>1</a:t>
-            </a:r>
-          </a:p>
+          <a:bodyPr rtlCol="0" anchor="ctr"/>
+          <a:lstStyle/>
+          <a:p/>
         </p:txBody>
       </p:sp>
       <p:sp>
@@ -8669,58 +10771,49 @@
         </p:nvSpPr>
         <p:spPr>
           <a:xfrm>
-            <a:off x="1234440" y="1600200"/>
-            <a:ext cx="10408615" cy="1030986"/>
-          </a:xfrm>
-          <a:prstGeom prst="rect">
-            <a:avLst/>
-          </a:prstGeom>
-          <a:noFill/>
-        </p:spPr>
-        <p:txBody>
-          <a:bodyPr wrap="square" anchor="t" lIns="0" rIns="0" tIns="0" bIns="0"/>
+            <a:off x="777240" y="1600200"/>
+            <a:ext cx="4907127" cy="640080"/>
+          </a:xfrm>
+          <a:prstGeom prst="rect">
+            <a:avLst/>
+          </a:prstGeom>
+          <a:noFill/>
+        </p:spPr>
+        <p:txBody>
+          <a:bodyPr wrap="square" anchor="ctr" lIns="0" rIns="0" tIns="0" bIns="0"/>
           <a:lstStyle/>
           <a:p>
             <a:pPr algn="l"/>
             <a:r>
-              <a:rPr sz="1800" b="0" i="0">
-                <a:solidFill>
-                  <a:srgbClr val="54595D"/>
-                </a:solidFill>
-                <a:latin typeface="Calibri"/>
-              </a:rPr>
-              <a:t>Which standard covers technical drawings?</a:t>
-            </a:r>
-          </a:p>
-          <a:p>
-            <a:r>
-              <a:rPr sz="1800" b="1">
-                <a:solidFill>
-                  <a:srgbClr val="03306E"/>
-                </a:solidFill>
-                <a:latin typeface="Calibri"/>
-              </a:rPr>
-              <a:t>BS EN 8888.</a:t>
-            </a:r>
-          </a:p>
-        </p:txBody>
-      </p:sp>
-      <p:sp>
-        <p:nvSpPr>
-          <p:cNvPr id="8" name="Oval 7"/>
+              <a:rPr sz="2000" b="1" i="0">
+                <a:solidFill>
+                  <a:srgbClr val="FFFFFF"/>
+                </a:solidFill>
+                <a:latin typeface="Calibri"/>
+              </a:rPr>
+              <a:t>Methods</a:t>
+            </a:r>
+          </a:p>
+        </p:txBody>
+      </p:sp>
+      <p:sp>
+        <p:nvSpPr>
+          <p:cNvPr id="8" name="Rounded Rectangle 7"/>
           <p:cNvSpPr/>
           <p:nvPr/>
         </p:nvSpPr>
         <p:spPr>
           <a:xfrm>
-            <a:off x="548640" y="2814066"/>
-            <a:ext cx="411480" cy="411480"/>
-          </a:xfrm>
-          <a:prstGeom prst="ellipse">
-            <a:avLst/>
+            <a:off x="548640" y="2377440"/>
+            <a:ext cx="5364327" cy="3794760"/>
+          </a:xfrm>
+          <a:prstGeom prst="roundRect">
+            <a:avLst>
+              <a:gd name="adj" fmla="val 4000"/>
+            </a:avLst>
           </a:prstGeom>
           <a:solidFill>
-            <a:srgbClr val="E0463A"/>
+            <a:srgbClr val="EAF3FF"/>
           </a:solidFill>
           <a:ln>
             <a:noFill/>
@@ -8742,20 +10835,9 @@
           </a:fontRef>
         </p:style>
         <p:txBody>
-          <a:bodyPr rtlCol="0" anchor="ctr" lIns="0" rIns="0" tIns="0" bIns="0"/>
-          <a:lstStyle/>
-          <a:p>
-            <a:pPr algn="ctr"/>
-            <a:r>
-              <a:rPr sz="1400" b="1">
-                <a:solidFill>
-                  <a:srgbClr val="FFFFFF"/>
-                </a:solidFill>
-                <a:latin typeface="Calibri"/>
-              </a:rPr>
-              <a:t>2</a:t>
-            </a:r>
-          </a:p>
+          <a:bodyPr rtlCol="0" anchor="ctr"/>
+          <a:lstStyle/>
+          <a:p/>
         </p:txBody>
       </p:sp>
       <p:sp>
@@ -8766,58 +10848,144 @@
         </p:nvSpPr>
         <p:spPr>
           <a:xfrm>
-            <a:off x="1234440" y="2795778"/>
-            <a:ext cx="10408615" cy="1030986"/>
-          </a:xfrm>
-          <a:prstGeom prst="rect">
-            <a:avLst/>
-          </a:prstGeom>
-          <a:noFill/>
-        </p:spPr>
-        <p:txBody>
-          <a:bodyPr wrap="square" anchor="t" lIns="0" rIns="0" tIns="0" bIns="0"/>
-          <a:lstStyle/>
-          <a:p>
-            <a:pPr algn="l"/>
-            <a:r>
-              <a:rPr sz="1800" b="0" i="0">
-                <a:solidFill>
-                  <a:srgbClr val="54595D"/>
-                </a:solidFill>
-                <a:latin typeface="Calibri"/>
-              </a:rPr>
-              <a:t>What does a section view show?</a:t>
-            </a:r>
-          </a:p>
-          <a:p>
-            <a:r>
-              <a:rPr sz="1800" b="1">
-                <a:solidFill>
-                  <a:srgbClr val="03306E"/>
-                </a:solidFill>
-                <a:latin typeface="Calibri"/>
-              </a:rPr>
-              <a:t>The inside of a part as if cut through, with hatching.</a:t>
-            </a:r>
-          </a:p>
-        </p:txBody>
-      </p:sp>
-      <p:sp>
-        <p:nvSpPr>
-          <p:cNvPr id="10" name="Oval 9"/>
+            <a:off x="822959" y="2606040"/>
+            <a:ext cx="4815687" cy="3337560"/>
+          </a:xfrm>
+          <a:prstGeom prst="rect">
+            <a:avLst/>
+          </a:prstGeom>
+          <a:noFill/>
+        </p:spPr>
+        <p:txBody>
+          <a:bodyPr wrap="square" lIns="0" rIns="0" tIns="0" bIns="0">
+            <a:spAutoFit/>
+          </a:bodyPr>
+          <a:lstStyle/>
+          <a:p>
+            <a:pPr marL="274320" indent="-274320">
+              <a:spcAft>
+                <a:spcPts val="945"/>
+              </a:spcAft>
+              <a:buClr>
+                <a:srgbClr val="0645AD"/>
+              </a:buClr>
+              <a:buFont typeface="Arial"/>
+              <a:buChar char="•"/>
+            </a:pPr>
+            <a:r>
+              <a:rPr sz="2100" b="0">
+                <a:solidFill>
+                  <a:srgbClr val="202122"/>
+                </a:solidFill>
+                <a:latin typeface="Calibri"/>
+              </a:rPr>
+              <a:t>CAD models and engineering drawings</a:t>
+            </a:r>
+          </a:p>
+          <a:p>
+            <a:pPr marL="274320" indent="-274320">
+              <a:spcAft>
+                <a:spcPts val="945"/>
+              </a:spcAft>
+              <a:buClr>
+                <a:srgbClr val="0645AD"/>
+              </a:buClr>
+              <a:buFont typeface="Arial"/>
+              <a:buChar char="•"/>
+            </a:pPr>
+            <a:r>
+              <a:rPr sz="2100" b="0">
+                <a:solidFill>
+                  <a:srgbClr val="202122"/>
+                </a:solidFill>
+                <a:latin typeface="Calibri"/>
+              </a:rPr>
+              <a:t>Specifications, SOPs and reports</a:t>
+            </a:r>
+          </a:p>
+          <a:p>
+            <a:pPr marL="274320" indent="-274320">
+              <a:spcAft>
+                <a:spcPts val="945"/>
+              </a:spcAft>
+              <a:buClr>
+                <a:srgbClr val="0645AD"/>
+              </a:buClr>
+              <a:buFont typeface="Arial"/>
+              <a:buChar char="•"/>
+            </a:pPr>
+            <a:r>
+              <a:rPr sz="2100" b="0">
+                <a:solidFill>
+                  <a:srgbClr val="202122"/>
+                </a:solidFill>
+                <a:latin typeface="Calibri"/>
+              </a:rPr>
+              <a:t>Presentations</a:t>
+            </a:r>
+          </a:p>
+          <a:p>
+            <a:pPr marL="274320" indent="-274320">
+              <a:spcAft>
+                <a:spcPts val="945"/>
+              </a:spcAft>
+              <a:buClr>
+                <a:srgbClr val="0645AD"/>
+              </a:buClr>
+              <a:buFont typeface="Arial"/>
+              <a:buChar char="•"/>
+            </a:pPr>
+            <a:r>
+              <a:rPr sz="2100" b="0">
+                <a:solidFill>
+                  <a:srgbClr val="202122"/>
+                </a:solidFill>
+                <a:latin typeface="Calibri"/>
+              </a:rPr>
+              <a:t>Graphs of performance data and SPC</a:t>
+            </a:r>
+          </a:p>
+          <a:p>
+            <a:pPr marL="274320" indent="-274320">
+              <a:spcAft>
+                <a:spcPts val="945"/>
+              </a:spcAft>
+              <a:buClr>
+                <a:srgbClr val="0645AD"/>
+              </a:buClr>
+              <a:buFont typeface="Arial"/>
+              <a:buChar char="•"/>
+            </a:pPr>
+            <a:r>
+              <a:rPr sz="2100" b="0">
+                <a:solidFill>
+                  <a:srgbClr val="202122"/>
+                </a:solidFill>
+                <a:latin typeface="Calibri"/>
+              </a:rPr>
+              <a:t>Sending programs to CNC machines</a:t>
+            </a:r>
+          </a:p>
+        </p:txBody>
+      </p:sp>
+      <p:sp>
+        <p:nvSpPr>
+          <p:cNvPr id="10" name="Rounded Rectangle 9"/>
           <p:cNvSpPr/>
           <p:nvPr/>
         </p:nvSpPr>
         <p:spPr>
           <a:xfrm>
-            <a:off x="548640" y="4009644"/>
-            <a:ext cx="411480" cy="411480"/>
-          </a:xfrm>
-          <a:prstGeom prst="ellipse">
-            <a:avLst/>
+            <a:off x="6278727" y="1600200"/>
+            <a:ext cx="5364327" cy="640080"/>
+          </a:xfrm>
+          <a:prstGeom prst="roundRect">
+            <a:avLst>
+              <a:gd name="adj" fmla="val 15000"/>
+            </a:avLst>
           </a:prstGeom>
           <a:solidFill>
-            <a:srgbClr val="E0463A"/>
+            <a:srgbClr val="0645AD"/>
           </a:solidFill>
           <a:ln>
             <a:noFill/>
@@ -8839,20 +11007,9 @@
           </a:fontRef>
         </p:style>
         <p:txBody>
-          <a:bodyPr rtlCol="0" anchor="ctr" lIns="0" rIns="0" tIns="0" bIns="0"/>
-          <a:lstStyle/>
-          <a:p>
-            <a:pPr algn="ctr"/>
-            <a:r>
-              <a:rPr sz="1400" b="1">
-                <a:solidFill>
-                  <a:srgbClr val="FFFFFF"/>
-                </a:solidFill>
-                <a:latin typeface="Calibri"/>
-              </a:rPr>
-              <a:t>3</a:t>
-            </a:r>
-          </a:p>
+          <a:bodyPr rtlCol="0" anchor="ctr"/>
+          <a:lstStyle/>
+          <a:p/>
         </p:txBody>
       </p:sp>
       <p:sp>
@@ -8863,58 +11020,49 @@
         </p:nvSpPr>
         <p:spPr>
           <a:xfrm>
-            <a:off x="1234440" y="3991356"/>
-            <a:ext cx="10408615" cy="1030986"/>
-          </a:xfrm>
-          <a:prstGeom prst="rect">
-            <a:avLst/>
-          </a:prstGeom>
-          <a:noFill/>
-        </p:spPr>
-        <p:txBody>
-          <a:bodyPr wrap="square" anchor="t" lIns="0" rIns="0" tIns="0" bIns="0"/>
+            <a:off x="6507327" y="1600200"/>
+            <a:ext cx="4907127" cy="640080"/>
+          </a:xfrm>
+          <a:prstGeom prst="rect">
+            <a:avLst/>
+          </a:prstGeom>
+          <a:noFill/>
+        </p:spPr>
+        <p:txBody>
+          <a:bodyPr wrap="square" anchor="ctr" lIns="0" rIns="0" tIns="0" bIns="0"/>
           <a:lstStyle/>
           <a:p>
             <a:pPr algn="l"/>
             <a:r>
-              <a:rPr sz="1800" b="0" i="0">
-                <a:solidFill>
-                  <a:srgbClr val="54595D"/>
-                </a:solidFill>
-                <a:latin typeface="Calibri"/>
-              </a:rPr>
-              <a:t>What is CAE used for?</a:t>
-            </a:r>
-          </a:p>
-          <a:p>
-            <a:r>
-              <a:rPr sz="1800" b="1">
-                <a:solidFill>
-                  <a:srgbClr val="03306E"/>
-                </a:solidFill>
-                <a:latin typeface="Calibri"/>
-              </a:rPr>
-              <a:t>Simulating and analysing how a design will perform.</a:t>
-            </a:r>
-          </a:p>
-        </p:txBody>
-      </p:sp>
-      <p:sp>
-        <p:nvSpPr>
-          <p:cNvPr id="12" name="Oval 11"/>
+              <a:rPr sz="2000" b="1" i="0">
+                <a:solidFill>
+                  <a:srgbClr val="FFFFFF"/>
+                </a:solidFill>
+                <a:latin typeface="Calibri"/>
+              </a:rPr>
+              <a:t>Audiences</a:t>
+            </a:r>
+          </a:p>
+        </p:txBody>
+      </p:sp>
+      <p:sp>
+        <p:nvSpPr>
+          <p:cNvPr id="12" name="Rounded Rectangle 11"/>
           <p:cNvSpPr/>
           <p:nvPr/>
         </p:nvSpPr>
         <p:spPr>
           <a:xfrm>
-            <a:off x="548640" y="5205221"/>
-            <a:ext cx="411480" cy="411480"/>
-          </a:xfrm>
-          <a:prstGeom prst="ellipse">
-            <a:avLst/>
+            <a:off x="6278727" y="2377440"/>
+            <a:ext cx="5364327" cy="3794760"/>
+          </a:xfrm>
+          <a:prstGeom prst="roundRect">
+            <a:avLst>
+              <a:gd name="adj" fmla="val 4000"/>
+            </a:avLst>
           </a:prstGeom>
           <a:solidFill>
-            <a:srgbClr val="E0463A"/>
+            <a:srgbClr val="EAF3FF"/>
           </a:solidFill>
           <a:ln>
             <a:noFill/>
@@ -8936,20 +11084,9 @@
           </a:fontRef>
         </p:style>
         <p:txBody>
-          <a:bodyPr rtlCol="0" anchor="ctr" lIns="0" rIns="0" tIns="0" bIns="0"/>
-          <a:lstStyle/>
-          <a:p>
-            <a:pPr algn="ctr"/>
-            <a:r>
-              <a:rPr sz="1400" b="1">
-                <a:solidFill>
-                  <a:srgbClr val="FFFFFF"/>
-                </a:solidFill>
-                <a:latin typeface="Calibri"/>
-              </a:rPr>
-              <a:t>4</a:t>
-            </a:r>
-          </a:p>
+          <a:bodyPr rtlCol="0" anchor="ctr"/>
+          <a:lstStyle/>
+          <a:p/>
         </p:txBody>
       </p:sp>
       <p:sp>
@@ -8960,38 +11097,101 @@
         </p:nvSpPr>
         <p:spPr>
           <a:xfrm>
-            <a:off x="1234440" y="5186933"/>
-            <a:ext cx="10408615" cy="1030986"/>
-          </a:xfrm>
-          <a:prstGeom prst="rect">
-            <a:avLst/>
-          </a:prstGeom>
-          <a:noFill/>
-        </p:spPr>
-        <p:txBody>
-          <a:bodyPr wrap="square" anchor="t" lIns="0" rIns="0" tIns="0" bIns="0"/>
-          <a:lstStyle/>
-          <a:p>
-            <a:pPr algn="l"/>
-            <a:r>
-              <a:rPr sz="1800" b="0" i="0">
-                <a:solidFill>
-                  <a:srgbClr val="54595D"/>
-                </a:solidFill>
-                <a:latin typeface="Calibri"/>
-              </a:rPr>
-              <a:t>Who is IMechE?</a:t>
-            </a:r>
-          </a:p>
-          <a:p>
-            <a:r>
-              <a:rPr sz="1800" b="1">
-                <a:solidFill>
-                  <a:srgbClr val="03306E"/>
-                </a:solidFill>
-                <a:latin typeface="Calibri"/>
-              </a:rPr>
-              <a:t>The Institution of Mechanical Engineers.</a:t>
+            <a:off x="6553047" y="2606040"/>
+            <a:ext cx="4815687" cy="3337560"/>
+          </a:xfrm>
+          <a:prstGeom prst="rect">
+            <a:avLst/>
+          </a:prstGeom>
+          <a:noFill/>
+        </p:spPr>
+        <p:txBody>
+          <a:bodyPr wrap="square" lIns="0" rIns="0" tIns="0" bIns="0">
+            <a:spAutoFit/>
+          </a:bodyPr>
+          <a:lstStyle/>
+          <a:p>
+            <a:pPr marL="274320" indent="-274320">
+              <a:spcAft>
+                <a:spcPts val="990"/>
+              </a:spcAft>
+              <a:buClr>
+                <a:srgbClr val="0645AD"/>
+              </a:buClr>
+              <a:buFont typeface="Arial"/>
+              <a:buChar char="•"/>
+            </a:pPr>
+            <a:r>
+              <a:rPr sz="2200" b="0">
+                <a:solidFill>
+                  <a:srgbClr val="202122"/>
+                </a:solidFill>
+                <a:latin typeface="Calibri"/>
+              </a:rPr>
+              <a:t>Designers</a:t>
+            </a:r>
+          </a:p>
+          <a:p>
+            <a:pPr marL="274320" indent="-274320">
+              <a:spcAft>
+                <a:spcPts val="990"/>
+              </a:spcAft>
+              <a:buClr>
+                <a:srgbClr val="0645AD"/>
+              </a:buClr>
+              <a:buFont typeface="Arial"/>
+              <a:buChar char="•"/>
+            </a:pPr>
+            <a:r>
+              <a:rPr sz="2200" b="0">
+                <a:solidFill>
+                  <a:srgbClr val="202122"/>
+                </a:solidFill>
+                <a:latin typeface="Calibri"/>
+              </a:rPr>
+              <a:t>Manufacturing engineers</a:t>
+            </a:r>
+          </a:p>
+          <a:p>
+            <a:pPr marL="274320" indent="-274320">
+              <a:spcAft>
+                <a:spcPts val="990"/>
+              </a:spcAft>
+              <a:buClr>
+                <a:srgbClr val="0645AD"/>
+              </a:buClr>
+              <a:buFont typeface="Arial"/>
+              <a:buChar char="•"/>
+            </a:pPr>
+            <a:r>
+              <a:rPr sz="2200" b="0">
+                <a:solidFill>
+                  <a:srgbClr val="202122"/>
+                </a:solidFill>
+                <a:latin typeface="Calibri"/>
+              </a:rPr>
+              <a:t>Customers</a:t>
+            </a:r>
+          </a:p>
+          <a:p>
+            <a:pPr marL="274320" indent="-274320">
+              <a:spcAft>
+                <a:spcPts val="990"/>
+              </a:spcAft>
+              <a:buClr>
+                <a:srgbClr val="0645AD"/>
+              </a:buClr>
+              <a:buFont typeface="Arial"/>
+              <a:buChar char="•"/>
+            </a:pPr>
+            <a:r>
+              <a:rPr sz="2200" b="0">
+                <a:solidFill>
+                  <a:srgbClr val="202122"/>
+                </a:solidFill>
+                <a:latin typeface="Calibri"/>
+              </a:rPr>
+              <a:t>Non-technical personnel</a:t>
             </a:r>
           </a:p>
         </p:txBody>
@@ -9083,7 +11283,7 @@
                 </a:solidFill>
                 <a:latin typeface="Cambria"/>
               </a:rPr>
-              <a:t>Activity: Three audiences</a:t>
+              <a:t>Quick check: Communicating engineering information</a:t>
             </a:r>
           </a:p>
         </p:txBody>
@@ -9156,19 +11356,17 @@
       </p:sp>
       <p:sp>
         <p:nvSpPr>
-          <p:cNvPr id="6" name="Rounded Rectangle 5"/>
+          <p:cNvPr id="6" name="Oval 5"/>
           <p:cNvSpPr/>
           <p:nvPr/>
         </p:nvSpPr>
         <p:spPr>
           <a:xfrm>
-            <a:off x="548640" y="1508760"/>
-            <a:ext cx="2011680" cy="457200"/>
-          </a:xfrm>
-          <a:prstGeom prst="roundRect">
-            <a:avLst>
-              <a:gd name="adj" fmla="val 50000"/>
-            </a:avLst>
+            <a:off x="548640" y="1691640"/>
+            <a:ext cx="502920" cy="502920"/>
+          </a:xfrm>
+          <a:prstGeom prst="ellipse">
+            <a:avLst/>
           </a:prstGeom>
           <a:solidFill>
             <a:srgbClr val="E0463A"/>
@@ -9193,9 +11391,20 @@
           </a:fontRef>
         </p:style>
         <p:txBody>
-          <a:bodyPr rtlCol="0" anchor="ctr"/>
-          <a:lstStyle/>
-          <a:p/>
+          <a:bodyPr rtlCol="0" anchor="ctr" lIns="0" rIns="0" tIns="0" bIns="0"/>
+          <a:lstStyle/>
+          <a:p>
+            <a:pPr algn="ctr"/>
+            <a:r>
+              <a:rPr sz="1600" b="1">
+                <a:solidFill>
+                  <a:srgbClr val="FFFFFF"/>
+                </a:solidFill>
+                <a:latin typeface="Calibri"/>
+              </a:rPr>
+              <a:t>1</a:t>
+            </a:r>
+          </a:p>
         </p:txBody>
       </p:sp>
       <p:sp>
@@ -9206,80 +11415,47 @@
         </p:nvSpPr>
         <p:spPr>
           <a:xfrm>
-            <a:off x="548640" y="1508760"/>
-            <a:ext cx="2011680" cy="457200"/>
-          </a:xfrm>
-          <a:prstGeom prst="rect">
-            <a:avLst/>
-          </a:prstGeom>
-          <a:noFill/>
-        </p:spPr>
-        <p:txBody>
-          <a:bodyPr wrap="square" anchor="ctr" lIns="0" rIns="0" tIns="0" bIns="0"/>
-          <a:lstStyle/>
-          <a:p>
-            <a:pPr algn="ctr"/>
-            <a:r>
-              <a:rPr sz="1400" b="1" i="0">
-                <a:solidFill>
-                  <a:srgbClr val="FFFFFF"/>
-                </a:solidFill>
-                <a:latin typeface="Calibri"/>
-              </a:rPr>
-              <a:t>30 minutes</a:t>
-            </a:r>
-          </a:p>
-        </p:txBody>
-      </p:sp>
-      <p:sp>
-        <p:nvSpPr>
-          <p:cNvPr id="8" name="TextBox 7"/>
-          <p:cNvSpPr txBox="1"/>
-          <p:nvPr/>
-        </p:nvSpPr>
-        <p:spPr>
-          <a:xfrm>
-            <a:off x="2743200" y="1508760"/>
-            <a:ext cx="4754880" cy="457200"/>
-          </a:xfrm>
-          <a:prstGeom prst="rect">
-            <a:avLst/>
-          </a:prstGeom>
-          <a:noFill/>
-        </p:spPr>
-        <p:txBody>
-          <a:bodyPr wrap="square" anchor="ctr" lIns="0" rIns="0" tIns="0" bIns="0"/>
+            <a:off x="1371600" y="1645920"/>
+            <a:ext cx="10271455" cy="1188720"/>
+          </a:xfrm>
+          <a:prstGeom prst="rect">
+            <a:avLst/>
+          </a:prstGeom>
+          <a:noFill/>
+        </p:spPr>
+        <p:txBody>
+          <a:bodyPr wrap="square" anchor="t" lIns="0" rIns="0" tIns="0" bIns="0"/>
           <a:lstStyle/>
           <a:p>
             <a:pPr algn="l"/>
             <a:r>
-              <a:rPr sz="1400" b="0" i="1">
-                <a:solidFill>
-                  <a:srgbClr val="54595D"/>
-                </a:solidFill>
-                <a:latin typeface="Calibri"/>
-              </a:rPr>
-              <a:t>Small groups</a:t>
-            </a:r>
-          </a:p>
-        </p:txBody>
-      </p:sp>
-      <p:sp>
-        <p:nvSpPr>
-          <p:cNvPr id="9" name="Oval 8"/>
+              <a:rPr sz="2400" b="0" i="0">
+                <a:solidFill>
+                  <a:srgbClr val="202122"/>
+                </a:solidFill>
+                <a:latin typeface="Calibri"/>
+              </a:rPr>
+              <a:t>What does CAE do?</a:t>
+            </a:r>
+          </a:p>
+        </p:txBody>
+      </p:sp>
+      <p:sp>
+        <p:nvSpPr>
+          <p:cNvPr id="8" name="Oval 7"/>
           <p:cNvSpPr/>
           <p:nvPr/>
         </p:nvSpPr>
         <p:spPr>
           <a:xfrm>
-            <a:off x="548640" y="2482596"/>
-            <a:ext cx="384048" cy="384048"/>
+            <a:off x="548640" y="3108960"/>
+            <a:ext cx="502920" cy="502920"/>
           </a:xfrm>
           <a:prstGeom prst="ellipse">
             <a:avLst/>
           </a:prstGeom>
           <a:solidFill>
-            <a:srgbClr val="0645AD"/>
+            <a:srgbClr val="E0463A"/>
           </a:solidFill>
           <a:ln>
             <a:noFill/>
@@ -9306,66 +11482,66 @@
           <a:p>
             <a:pPr algn="ctr"/>
             <a:r>
-              <a:rPr sz="1300" b="1">
+              <a:rPr sz="1600" b="1">
                 <a:solidFill>
                   <a:srgbClr val="FFFFFF"/>
                 </a:solidFill>
                 <a:latin typeface="Calibri"/>
               </a:rPr>
-              <a:t>1</a:t>
-            </a:r>
-          </a:p>
-        </p:txBody>
-      </p:sp>
-      <p:sp>
-        <p:nvSpPr>
-          <p:cNvPr id="10" name="TextBox 9"/>
+              <a:t>2</a:t>
+            </a:r>
+          </a:p>
+        </p:txBody>
+      </p:sp>
+      <p:sp>
+        <p:nvSpPr>
+          <p:cNvPr id="9" name="TextBox 8"/>
           <p:cNvSpPr txBox="1"/>
           <p:nvPr/>
         </p:nvSpPr>
         <p:spPr>
           <a:xfrm>
-            <a:off x="1143000" y="2240280"/>
-            <a:ext cx="5943600" cy="868680"/>
-          </a:xfrm>
-          <a:prstGeom prst="rect">
-            <a:avLst/>
-          </a:prstGeom>
-          <a:noFill/>
-        </p:spPr>
-        <p:txBody>
-          <a:bodyPr wrap="square" anchor="ctr" lIns="0" rIns="0" tIns="0" bIns="0"/>
+            <a:off x="1371600" y="3063240"/>
+            <a:ext cx="10271455" cy="1188720"/>
+          </a:xfrm>
+          <a:prstGeom prst="rect">
+            <a:avLst/>
+          </a:prstGeom>
+          <a:noFill/>
+        </p:spPr>
+        <p:txBody>
+          <a:bodyPr wrap="square" anchor="t" lIns="0" rIns="0" tIns="0" bIns="0"/>
           <a:lstStyle/>
           <a:p>
             <a:pPr algn="l"/>
             <a:r>
-              <a:rPr sz="1700" b="0" i="0">
+              <a:rPr sz="2400" b="0" i="0">
                 <a:solidFill>
                   <a:srgbClr val="202122"/>
                 </a:solidFill>
                 <a:latin typeface="Calibri"/>
               </a:rPr>
-              <a:t>Take a simple component such as a shaft with a keyway.</a:t>
-            </a:r>
-          </a:p>
-        </p:txBody>
-      </p:sp>
-      <p:sp>
-        <p:nvSpPr>
-          <p:cNvPr id="11" name="Oval 10"/>
+              <a:t>How do CNC machines get instructions from CAD?</a:t>
+            </a:r>
+          </a:p>
+        </p:txBody>
+      </p:sp>
+      <p:sp>
+        <p:nvSpPr>
+          <p:cNvPr id="10" name="Oval 9"/>
           <p:cNvSpPr/>
           <p:nvPr/>
         </p:nvSpPr>
         <p:spPr>
           <a:xfrm>
-            <a:off x="548640" y="3461004"/>
-            <a:ext cx="384048" cy="384048"/>
+            <a:off x="548640" y="4526280"/>
+            <a:ext cx="502920" cy="502920"/>
           </a:xfrm>
           <a:prstGeom prst="ellipse">
             <a:avLst/>
           </a:prstGeom>
           <a:solidFill>
-            <a:srgbClr val="0645AD"/>
+            <a:srgbClr val="E0463A"/>
           </a:solidFill>
           <a:ln>
             <a:noFill/>
@@ -9392,13 +11568,46 @@
           <a:p>
             <a:pPr algn="ctr"/>
             <a:r>
-              <a:rPr sz="1300" b="1">
+              <a:rPr sz="1600" b="1">
                 <a:solidFill>
                   <a:srgbClr val="FFFFFF"/>
                 </a:solidFill>
                 <a:latin typeface="Calibri"/>
               </a:rPr>
-              <a:t>2</a:t>
+              <a:t>3</a:t>
+            </a:r>
+          </a:p>
+        </p:txBody>
+      </p:sp>
+      <p:sp>
+        <p:nvSpPr>
+          <p:cNvPr id="11" name="TextBox 10"/>
+          <p:cNvSpPr txBox="1"/>
+          <p:nvPr/>
+        </p:nvSpPr>
+        <p:spPr>
+          <a:xfrm>
+            <a:off x="1371600" y="4480560"/>
+            <a:ext cx="10271455" cy="1188720"/>
+          </a:xfrm>
+          <a:prstGeom prst="rect">
+            <a:avLst/>
+          </a:prstGeom>
+          <a:noFill/>
+        </p:spPr>
+        <p:txBody>
+          <a:bodyPr wrap="square" anchor="t" lIns="0" rIns="0" tIns="0" bIns="0"/>
+          <a:lstStyle/>
+          <a:p>
+            <a:pPr algn="l"/>
+            <a:r>
+              <a:rPr sz="2400" b="0" i="0">
+                <a:solidFill>
+                  <a:srgbClr val="202122"/>
+                </a:solidFill>
+                <a:latin typeface="Calibri"/>
+              </a:rPr>
+              <a:t>Why adapt the format to the audience?</a:t>
             </a:r>
           </a:p>
         </p:txBody>
@@ -9411,362 +11620,27 @@
         </p:nvSpPr>
         <p:spPr>
           <a:xfrm>
-            <a:off x="1143000" y="3218688"/>
-            <a:ext cx="5943600" cy="868680"/>
-          </a:xfrm>
-          <a:prstGeom prst="rect">
-            <a:avLst/>
-          </a:prstGeom>
-          <a:noFill/>
-        </p:spPr>
-        <p:txBody>
-          <a:bodyPr wrap="square" anchor="ctr" lIns="0" rIns="0" tIns="0" bIns="0"/>
+            <a:off x="548640" y="5852160"/>
+            <a:ext cx="11094415" cy="365760"/>
+          </a:xfrm>
+          <a:prstGeom prst="rect">
+            <a:avLst/>
+          </a:prstGeom>
+          <a:noFill/>
+        </p:spPr>
+        <p:txBody>
+          <a:bodyPr wrap="square" anchor="t" lIns="0" rIns="0" tIns="0" bIns="0"/>
           <a:lstStyle/>
           <a:p>
             <a:pPr algn="l"/>
             <a:r>
-              <a:rPr sz="1700" b="0" i="0">
-                <a:solidFill>
-                  <a:srgbClr val="202122"/>
-                </a:solidFill>
-                <a:latin typeface="Calibri"/>
-              </a:rPr>
-              <a:t>Produce a detailed drawing for the machinist.</a:t>
-            </a:r>
-          </a:p>
-        </p:txBody>
-      </p:sp>
-      <p:sp>
-        <p:nvSpPr>
-          <p:cNvPr id="13" name="Oval 12"/>
-          <p:cNvSpPr/>
-          <p:nvPr/>
-        </p:nvSpPr>
-        <p:spPr>
-          <a:xfrm>
-            <a:off x="548640" y="4439412"/>
-            <a:ext cx="384048" cy="384048"/>
-          </a:xfrm>
-          <a:prstGeom prst="ellipse">
-            <a:avLst/>
-          </a:prstGeom>
-          <a:solidFill>
-            <a:srgbClr val="0645AD"/>
-          </a:solidFill>
-          <a:ln>
-            <a:noFill/>
-          </a:ln>
-          <a:effectLst/>
-        </p:spPr>
-        <p:style>
-          <a:lnRef idx="1">
-            <a:schemeClr val="accent1"/>
-          </a:lnRef>
-          <a:fillRef idx="3">
-            <a:schemeClr val="accent1"/>
-          </a:fillRef>
-          <a:effectRef idx="2">
-            <a:schemeClr val="accent1"/>
-          </a:effectRef>
-          <a:fontRef idx="minor">
-            <a:schemeClr val="lt1"/>
-          </a:fontRef>
-        </p:style>
-        <p:txBody>
-          <a:bodyPr rtlCol="0" anchor="ctr" lIns="0" rIns="0" tIns="0" bIns="0"/>
-          <a:lstStyle/>
-          <a:p>
-            <a:pPr algn="ctr"/>
-            <a:r>
-              <a:rPr sz="1300" b="1">
-                <a:solidFill>
-                  <a:srgbClr val="FFFFFF"/>
-                </a:solidFill>
-                <a:latin typeface="Calibri"/>
-              </a:rPr>
-              <a:t>3</a:t>
-            </a:r>
-          </a:p>
-        </p:txBody>
-      </p:sp>
-      <p:sp>
-        <p:nvSpPr>
-          <p:cNvPr id="14" name="TextBox 13"/>
-          <p:cNvSpPr txBox="1"/>
-          <p:nvPr/>
-        </p:nvSpPr>
-        <p:spPr>
-          <a:xfrm>
-            <a:off x="1143000" y="4197096"/>
-            <a:ext cx="5943600" cy="868680"/>
-          </a:xfrm>
-          <a:prstGeom prst="rect">
-            <a:avLst/>
-          </a:prstGeom>
-          <a:noFill/>
-        </p:spPr>
-        <p:txBody>
-          <a:bodyPr wrap="square" anchor="ctr" lIns="0" rIns="0" tIns="0" bIns="0"/>
-          <a:lstStyle/>
-          <a:p>
-            <a:pPr algn="l"/>
-            <a:r>
-              <a:rPr sz="1700" b="0" i="0">
-                <a:solidFill>
-                  <a:srgbClr val="202122"/>
-                </a:solidFill>
-                <a:latin typeface="Calibri"/>
-              </a:rPr>
-              <a:t>Produce a visual for the customer.</a:t>
-            </a:r>
-          </a:p>
-        </p:txBody>
-      </p:sp>
-      <p:sp>
-        <p:nvSpPr>
-          <p:cNvPr id="15" name="Oval 14"/>
-          <p:cNvSpPr/>
-          <p:nvPr/>
-        </p:nvSpPr>
-        <p:spPr>
-          <a:xfrm>
-            <a:off x="548640" y="5417820"/>
-            <a:ext cx="384048" cy="384048"/>
-          </a:xfrm>
-          <a:prstGeom prst="ellipse">
-            <a:avLst/>
-          </a:prstGeom>
-          <a:solidFill>
-            <a:srgbClr val="0645AD"/>
-          </a:solidFill>
-          <a:ln>
-            <a:noFill/>
-          </a:ln>
-          <a:effectLst/>
-        </p:spPr>
-        <p:style>
-          <a:lnRef idx="1">
-            <a:schemeClr val="accent1"/>
-          </a:lnRef>
-          <a:fillRef idx="3">
-            <a:schemeClr val="accent1"/>
-          </a:fillRef>
-          <a:effectRef idx="2">
-            <a:schemeClr val="accent1"/>
-          </a:effectRef>
-          <a:fontRef idx="minor">
-            <a:schemeClr val="lt1"/>
-          </a:fontRef>
-        </p:style>
-        <p:txBody>
-          <a:bodyPr rtlCol="0" anchor="ctr" lIns="0" rIns="0" tIns="0" bIns="0"/>
-          <a:lstStyle/>
-          <a:p>
-            <a:pPr algn="ctr"/>
-            <a:r>
-              <a:rPr sz="1300" b="1">
-                <a:solidFill>
-                  <a:srgbClr val="FFFFFF"/>
-                </a:solidFill>
-                <a:latin typeface="Calibri"/>
-              </a:rPr>
-              <a:t>4</a:t>
-            </a:r>
-          </a:p>
-        </p:txBody>
-      </p:sp>
-      <p:sp>
-        <p:nvSpPr>
-          <p:cNvPr id="16" name="TextBox 15"/>
-          <p:cNvSpPr txBox="1"/>
-          <p:nvPr/>
-        </p:nvSpPr>
-        <p:spPr>
-          <a:xfrm>
-            <a:off x="1143000" y="5175504"/>
-            <a:ext cx="5943600" cy="868680"/>
-          </a:xfrm>
-          <a:prstGeom prst="rect">
-            <a:avLst/>
-          </a:prstGeom>
-          <a:noFill/>
-        </p:spPr>
-        <p:txBody>
-          <a:bodyPr wrap="square" anchor="ctr" lIns="0" rIns="0" tIns="0" bIns="0"/>
-          <a:lstStyle/>
-          <a:p>
-            <a:pPr algn="l"/>
-            <a:r>
-              <a:rPr sz="1700" b="0" i="0">
-                <a:solidFill>
-                  <a:srgbClr val="202122"/>
-                </a:solidFill>
-                <a:latin typeface="Calibri"/>
-              </a:rPr>
-              <a:t>Write a one-paragraph summary for a manager.</a:t>
-            </a:r>
-          </a:p>
-        </p:txBody>
-      </p:sp>
-      <p:sp>
-        <p:nvSpPr>
-          <p:cNvPr id="17" name="Rounded Rectangle 16"/>
-          <p:cNvSpPr/>
-          <p:nvPr/>
-        </p:nvSpPr>
-        <p:spPr>
-          <a:xfrm>
-            <a:off x="7772400" y="1508760"/>
-            <a:ext cx="3867912" cy="4572000"/>
-          </a:xfrm>
-          <a:prstGeom prst="roundRect">
-            <a:avLst>
-              <a:gd name="adj" fmla="val 8000"/>
-            </a:avLst>
-          </a:prstGeom>
-          <a:solidFill>
-            <a:srgbClr val="EAF3FF"/>
-          </a:solidFill>
-          <a:ln>
-            <a:noFill/>
-          </a:ln>
-          <a:effectLst/>
-        </p:spPr>
-        <p:style>
-          <a:lnRef idx="1">
-            <a:schemeClr val="accent1"/>
-          </a:lnRef>
-          <a:fillRef idx="3">
-            <a:schemeClr val="accent1"/>
-          </a:fillRef>
-          <a:effectRef idx="2">
-            <a:schemeClr val="accent1"/>
-          </a:effectRef>
-          <a:fontRef idx="minor">
-            <a:schemeClr val="lt1"/>
-          </a:fontRef>
-        </p:style>
-        <p:txBody>
-          <a:bodyPr rtlCol="0" anchor="ctr"/>
-          <a:lstStyle/>
-          <a:p/>
-        </p:txBody>
-      </p:sp>
-      <p:sp>
-        <p:nvSpPr>
-          <p:cNvPr id="18" name="TextBox 17"/>
-          <p:cNvSpPr txBox="1"/>
-          <p:nvPr/>
-        </p:nvSpPr>
-        <p:spPr>
-          <a:xfrm>
-            <a:off x="8046720" y="1737360"/>
-            <a:ext cx="3291840" cy="365760"/>
-          </a:xfrm>
-          <a:prstGeom prst="rect">
-            <a:avLst/>
-          </a:prstGeom>
-          <a:noFill/>
-        </p:spPr>
-        <p:txBody>
-          <a:bodyPr wrap="square" anchor="t" lIns="0" rIns="0" tIns="0" bIns="0"/>
-          <a:lstStyle/>
-          <a:p>
-            <a:pPr algn="l"/>
-            <a:r>
-              <a:rPr sz="1300" b="1" i="0">
-                <a:solidFill>
-                  <a:srgbClr val="0645AD"/>
-                </a:solidFill>
-                <a:latin typeface="Calibri"/>
-              </a:rPr>
-              <a:t>SUCCESS CRITERIA</a:t>
-            </a:r>
-          </a:p>
-        </p:txBody>
-      </p:sp>
-      <p:sp>
-        <p:nvSpPr>
-          <p:cNvPr id="19" name="TextBox 18"/>
-          <p:cNvSpPr txBox="1"/>
-          <p:nvPr/>
-        </p:nvSpPr>
-        <p:spPr>
-          <a:xfrm>
-            <a:off x="8046720" y="2240280"/>
-            <a:ext cx="3337560" cy="3657600"/>
-          </a:xfrm>
-          <a:prstGeom prst="rect">
-            <a:avLst/>
-          </a:prstGeom>
-          <a:noFill/>
-        </p:spPr>
-        <p:txBody>
-          <a:bodyPr wrap="square" lIns="0" rIns="0" tIns="0" bIns="0">
-            <a:spAutoFit/>
-          </a:bodyPr>
-          <a:lstStyle/>
-          <a:p>
-            <a:pPr marL="274320" indent="-274320">
-              <a:spcAft>
-                <a:spcPts val="810"/>
-              </a:spcAft>
-              <a:buClr>
-                <a:srgbClr val="0645AD"/>
-              </a:buClr>
-              <a:buFont typeface="Arial"/>
-              <a:buChar char="•"/>
-            </a:pPr>
-            <a:r>
-              <a:rPr sz="1800" b="0">
-                <a:solidFill>
-                  <a:srgbClr val="202122"/>
-                </a:solidFill>
-                <a:latin typeface="Calibri"/>
-              </a:rPr>
-              <a:t>Drawing follows BS EN 8888</a:t>
-            </a:r>
-          </a:p>
-          <a:p>
-            <a:pPr marL="274320" indent="-274320">
-              <a:spcAft>
-                <a:spcPts val="810"/>
-              </a:spcAft>
-              <a:buClr>
-                <a:srgbClr val="0645AD"/>
-              </a:buClr>
-              <a:buFont typeface="Arial"/>
-              <a:buChar char="•"/>
-            </a:pPr>
-            <a:r>
-              <a:rPr sz="1800" b="0">
-                <a:solidFill>
-                  <a:srgbClr val="202122"/>
-                </a:solidFill>
-                <a:latin typeface="Calibri"/>
-              </a:rPr>
-              <a:t>Customer visual has no jargon</a:t>
-            </a:r>
-          </a:p>
-          <a:p>
-            <a:pPr marL="274320" indent="-274320">
-              <a:spcAft>
-                <a:spcPts val="810"/>
-              </a:spcAft>
-              <a:buClr>
-                <a:srgbClr val="0645AD"/>
-              </a:buClr>
-              <a:buFont typeface="Arial"/>
-              <a:buChar char="•"/>
-            </a:pPr>
-            <a:r>
-              <a:rPr sz="1800" b="0">
-                <a:solidFill>
-                  <a:srgbClr val="202122"/>
-                </a:solidFill>
-                <a:latin typeface="Calibri"/>
-              </a:rPr>
-              <a:t>Summary is concise</a:t>
+              <a:rPr sz="1300" b="0" i="1">
+                <a:solidFill>
+                  <a:srgbClr val="54595D"/>
+                </a:solidFill>
+                <a:latin typeface="Calibri"/>
+              </a:rPr>
+              <a:t>Answer on mini whiteboards or in your book. Answers are in the speaker notes.</a:t>
             </a:r>
           </a:p>
         </p:txBody>
